--- a/Badge CC.pptx
+++ b/Badge CC.pptx
@@ -5,21 +5,19 @@
     <p:sldMasterId id="2147483648" r:id="rId1"/>
   </p:sldMasterIdLst>
   <p:notesMasterIdLst>
-    <p:notesMasterId r:id="rId7"/>
+    <p:notesMasterId r:id="rId5"/>
   </p:notesMasterIdLst>
   <p:sldIdLst>
     <p:sldId id="295" r:id="rId2"/>
     <p:sldId id="302" r:id="rId3"/>
-    <p:sldId id="303" r:id="rId4"/>
-    <p:sldId id="304" r:id="rId5"/>
-    <p:sldId id="305" r:id="rId6"/>
+    <p:sldId id="305" r:id="rId4"/>
   </p:sldIdLst>
   <p:sldSz cx="9072563" cy="5832475"/>
   <p:notesSz cx="1493838" cy="2609850"/>
   <p:embeddedFontLst>
     <p:embeddedFont>
       <p:font typeface="Arial Black" panose="020B0A04020102020204" pitchFamily="34" charset="0"/>
-      <p:bold r:id="rId8"/>
+      <p:bold r:id="rId6"/>
     </p:embeddedFont>
   </p:embeddedFontLst>
   <p:defaultTextStyle>
@@ -258,8 +256,6 @@
           <p14:sldIdLst>
             <p14:sldId id="295"/>
             <p14:sldId id="302"/>
-            <p14:sldId id="303"/>
-            <p14:sldId id="304"/>
             <p14:sldId id="305"/>
           </p14:sldIdLst>
         </p14:section>
@@ -269,7 +265,7 @@
       <p15:sldGuideLst xmlns:p15="http://schemas.microsoft.com/office/powerpoint/2012/main"/>
     </p:ext>
     <p:ext uri="GoogleSlidesCustomDataVersion2">
-      <go:slidesCustomData xmlns="" xmlns:mc="http://schemas.openxmlformats.org/markup-compatibility/2006" xmlns:mv="urn:schemas-microsoft-com:mac:vml" xmlns:c="http://schemas.openxmlformats.org/drawingml/2006/chart" xmlns:dgm="http://schemas.openxmlformats.org/drawingml/2006/diagram" xmlns:o="urn:schemas-microsoft-com:office:office" xmlns:v="urn:schemas-microsoft-com:vml" xmlns:pvml="urn:schemas-microsoft-com:office:powerpoint" xmlns:com="http://schemas.openxmlformats.org/drawingml/2006/compatibility" xmlns:p14="http://schemas.microsoft.com/office/powerpoint/2010/main" xmlns:p15="http://schemas.microsoft.com/office/powerpoint/2012/main" xmlns:ahyp="http://schemas.microsoft.com/office/drawing/2018/hyperlinkcolor" xmlns:go="http://customooxmlschemas.google.com/" r:id="rId63" roundtripDataSignature="AMtx7miUS1/sxxL4JgbZEnfhDFKesaJ+9Q=="/>
+      <go:slidesCustomData xmlns:go="http://customooxmlschemas.google.com/" xmlns:ahyp="http://schemas.microsoft.com/office/drawing/2018/hyperlinkcolor" xmlns:p15="http://schemas.microsoft.com/office/powerpoint/2012/main" xmlns:p14="http://schemas.microsoft.com/office/powerpoint/2010/main" xmlns:com="http://schemas.openxmlformats.org/drawingml/2006/compatibility" xmlns:pvml="urn:schemas-microsoft-com:office:powerpoint" xmlns:v="urn:schemas-microsoft-com:vml" xmlns:o="urn:schemas-microsoft-com:office:office" xmlns:dgm="http://schemas.openxmlformats.org/drawingml/2006/diagram" xmlns:c="http://schemas.openxmlformats.org/drawingml/2006/chart" xmlns:mv="urn:schemas-microsoft-com:mac:vml" xmlns:mc="http://schemas.openxmlformats.org/markup-compatibility/2006" xmlns="" r:id="rId63" roundtripDataSignature="AMtx7miUS1/sxxL4JgbZEnfhDFKesaJ+9Q=="/>
     </p:ext>
   </p:extLst>
 </p:presentation>
@@ -288,7 +284,7 @@
   <pc:docChgLst>
     <pc:chgData name="Patryk Wyczółkowski - The Company" userId="288d461d-eaab-4b00-b800-aa4e5a28dfe6" providerId="ADAL" clId="{023E43D6-DC3E-4706-BB42-F0DBAC8333BE}"/>
     <pc:docChg chg="undo custSel addSld delSld modSld sldOrd addSection modSection">
-      <pc:chgData name="Patryk Wyczółkowski - The Company" userId="288d461d-eaab-4b00-b800-aa4e5a28dfe6" providerId="ADAL" clId="{023E43D6-DC3E-4706-BB42-F0DBAC8333BE}" dt="2026-04-04T14:23:28.108" v="197" actId="20577"/>
+      <pc:chgData name="Patryk Wyczółkowski - The Company" userId="288d461d-eaab-4b00-b800-aa4e5a28dfe6" providerId="ADAL" clId="{023E43D6-DC3E-4706-BB42-F0DBAC8333BE}" dt="2026-04-04T17:32:12.531" v="199" actId="47"/>
       <pc:docMkLst>
         <pc:docMk/>
       </pc:docMkLst>
@@ -368,8 +364,8 @@
           <pc:sldMk cId="1760921419" sldId="303"/>
         </pc:sldMkLst>
       </pc:sldChg>
-      <pc:sldChg chg="addSp delSp modSp add mod modNotesTx">
-        <pc:chgData name="Patryk Wyczółkowski - The Company" userId="288d461d-eaab-4b00-b800-aa4e5a28dfe6" providerId="ADAL" clId="{023E43D6-DC3E-4706-BB42-F0DBAC8333BE}" dt="2026-04-04T14:20:55.976" v="160" actId="404"/>
+      <pc:sldChg chg="addSp delSp modSp add del mod modNotesTx">
+        <pc:chgData name="Patryk Wyczółkowski - The Company" userId="288d461d-eaab-4b00-b800-aa4e5a28dfe6" providerId="ADAL" clId="{023E43D6-DC3E-4706-BB42-F0DBAC8333BE}" dt="2026-04-04T17:32:09.500" v="198" actId="47"/>
         <pc:sldMkLst>
           <pc:docMk/>
           <pc:sldMk cId="3531637373" sldId="303"/>
@@ -414,8 +410,8 @@
           <pc:sldMk cId="1180131338" sldId="304"/>
         </pc:sldMkLst>
       </pc:sldChg>
-      <pc:sldChg chg="modSp add mod modNotesTx">
-        <pc:chgData name="Patryk Wyczółkowski - The Company" userId="288d461d-eaab-4b00-b800-aa4e5a28dfe6" providerId="ADAL" clId="{023E43D6-DC3E-4706-BB42-F0DBAC8333BE}" dt="2026-04-04T14:21:19.231" v="187" actId="20577"/>
+      <pc:sldChg chg="modSp add del mod modNotesTx">
+        <pc:chgData name="Patryk Wyczółkowski - The Company" userId="288d461d-eaab-4b00-b800-aa4e5a28dfe6" providerId="ADAL" clId="{023E43D6-DC3E-4706-BB42-F0DBAC8333BE}" dt="2026-04-04T17:32:12.531" v="199" actId="47"/>
         <pc:sldMkLst>
           <pc:docMk/>
           <pc:sldMk cId="4032356528" sldId="304"/>
@@ -1098,234 +1094,6 @@
 </file>
 
 <file path=ppt/notesSlides/notesSlide3.xml><?xml version="1.0" encoding="utf-8"?>
-<p:notes xmlns:a="http://schemas.openxmlformats.org/drawingml/2006/main" xmlns:r="http://schemas.openxmlformats.org/officeDocument/2006/relationships" xmlns:p="http://schemas.openxmlformats.org/presentationml/2006/main">
-  <p:cSld>
-    <p:spTree>
-      <p:nvGrpSpPr>
-        <p:cNvPr id="1" name="">
-          <a:extLst>
-            <a:ext uri="{FF2B5EF4-FFF2-40B4-BE49-F238E27FC236}">
-              <a16:creationId xmlns:a16="http://schemas.microsoft.com/office/drawing/2014/main" id="{EEAC5308-009B-6795-AEDE-1839BBED93EA}"/>
-            </a:ext>
-          </a:extLst>
-        </p:cNvPr>
-        <p:cNvGrpSpPr/>
-        <p:nvPr/>
-      </p:nvGrpSpPr>
-      <p:grpSpPr>
-        <a:xfrm>
-          <a:off x="0" y="0"/>
-          <a:ext cx="0" cy="0"/>
-          <a:chOff x="0" y="0"/>
-          <a:chExt cx="0" cy="0"/>
-        </a:xfrm>
-      </p:grpSpPr>
-      <p:sp>
-        <p:nvSpPr>
-          <p:cNvPr id="2" name="Symbol zastępczy obrazu slajdu 1">
-            <a:extLst>
-              <a:ext uri="{FF2B5EF4-FFF2-40B4-BE49-F238E27FC236}">
-                <a16:creationId xmlns:a16="http://schemas.microsoft.com/office/drawing/2014/main" id="{756681F9-4D13-19F3-C215-0A6D78018A34}"/>
-              </a:ext>
-            </a:extLst>
-          </p:cNvPr>
-          <p:cNvSpPr>
-            <a:spLocks noGrp="1" noRot="1" noChangeAspect="1"/>
-          </p:cNvSpPr>
-          <p:nvPr>
-            <p:ph type="sldImg"/>
-          </p:nvPr>
-        </p:nvSpPr>
-        <p:spPr/>
-      </p:sp>
-      <p:sp>
-        <p:nvSpPr>
-          <p:cNvPr id="3" name="Symbol zastępczy notatek 2">
-            <a:extLst>
-              <a:ext uri="{FF2B5EF4-FFF2-40B4-BE49-F238E27FC236}">
-                <a16:creationId xmlns:a16="http://schemas.microsoft.com/office/drawing/2014/main" id="{02641F33-C59B-0E00-CE4F-3AE82154FCF5}"/>
-              </a:ext>
-            </a:extLst>
-          </p:cNvPr>
-          <p:cNvSpPr>
-            <a:spLocks noGrp="1"/>
-          </p:cNvSpPr>
-          <p:nvPr>
-            <p:ph type="body" idx="1"/>
-          </p:nvPr>
-        </p:nvSpPr>
-        <p:spPr/>
-        <p:txBody>
-          <a:bodyPr/>
-          <a:lstStyle/>
-          <a:p>
-            <a:pPr marL="158750" indent="0">
-              <a:buNone/>
-            </a:pPr>
-            <a:r>
-              <a:rPr lang="pl-PL" dirty="0"/>
-              <a:t>BNI+ Gość</a:t>
-            </a:r>
-          </a:p>
-        </p:txBody>
-      </p:sp>
-      <p:sp>
-        <p:nvSpPr>
-          <p:cNvPr id="4" name="Symbol zastępczy numeru slajdu 3">
-            <a:extLst>
-              <a:ext uri="{FF2B5EF4-FFF2-40B4-BE49-F238E27FC236}">
-                <a16:creationId xmlns:a16="http://schemas.microsoft.com/office/drawing/2014/main" id="{BC8DA16D-ABC5-213C-D35C-D090E135B3F7}"/>
-              </a:ext>
-            </a:extLst>
-          </p:cNvPr>
-          <p:cNvSpPr>
-            <a:spLocks noGrp="1"/>
-          </p:cNvSpPr>
-          <p:nvPr>
-            <p:ph type="sldNum" sz="quarter" idx="5"/>
-          </p:nvPr>
-        </p:nvSpPr>
-        <p:spPr/>
-        <p:txBody>
-          <a:bodyPr/>
-          <a:lstStyle/>
-          <a:p>
-            <a:fld id="{AA97F24F-3328-48D6-A448-1F10CC05B6F2}" type="slidenum">
-              <a:rPr lang="pl-PL" smtClean="0"/>
-              <a:t>3</a:t>
-            </a:fld>
-            <a:endParaRPr lang="pl-PL"/>
-          </a:p>
-        </p:txBody>
-      </p:sp>
-    </p:spTree>
-    <p:extLst>
-      <p:ext uri="{BB962C8B-B14F-4D97-AF65-F5344CB8AC3E}">
-        <p14:creationId xmlns:p14="http://schemas.microsoft.com/office/powerpoint/2010/main" val="1422660824"/>
-      </p:ext>
-    </p:extLst>
-  </p:cSld>
-  <p:clrMapOvr>
-    <a:masterClrMapping/>
-  </p:clrMapOvr>
-</p:notes>
-</file>
-
-<file path=ppt/notesSlides/notesSlide4.xml><?xml version="1.0" encoding="utf-8"?>
-<p:notes xmlns:a="http://schemas.openxmlformats.org/drawingml/2006/main" xmlns:r="http://schemas.openxmlformats.org/officeDocument/2006/relationships" xmlns:p="http://schemas.openxmlformats.org/presentationml/2006/main">
-  <p:cSld>
-    <p:spTree>
-      <p:nvGrpSpPr>
-        <p:cNvPr id="1" name="">
-          <a:extLst>
-            <a:ext uri="{FF2B5EF4-FFF2-40B4-BE49-F238E27FC236}">
-              <a16:creationId xmlns:a16="http://schemas.microsoft.com/office/drawing/2014/main" id="{502882F7-9D63-6528-FAEE-3772BC074170}"/>
-            </a:ext>
-          </a:extLst>
-        </p:cNvPr>
-        <p:cNvGrpSpPr/>
-        <p:nvPr/>
-      </p:nvGrpSpPr>
-      <p:grpSpPr>
-        <a:xfrm>
-          <a:off x="0" y="0"/>
-          <a:ext cx="0" cy="0"/>
-          <a:chOff x="0" y="0"/>
-          <a:chExt cx="0" cy="0"/>
-        </a:xfrm>
-      </p:grpSpPr>
-      <p:sp>
-        <p:nvSpPr>
-          <p:cNvPr id="2" name="Symbol zastępczy obrazu slajdu 1">
-            <a:extLst>
-              <a:ext uri="{FF2B5EF4-FFF2-40B4-BE49-F238E27FC236}">
-                <a16:creationId xmlns:a16="http://schemas.microsoft.com/office/drawing/2014/main" id="{70CD1600-8C44-177A-AD1B-6924AF2E148F}"/>
-              </a:ext>
-            </a:extLst>
-          </p:cNvPr>
-          <p:cNvSpPr>
-            <a:spLocks noGrp="1" noRot="1" noChangeAspect="1"/>
-          </p:cNvSpPr>
-          <p:nvPr>
-            <p:ph type="sldImg"/>
-          </p:nvPr>
-        </p:nvSpPr>
-        <p:spPr/>
-      </p:sp>
-      <p:sp>
-        <p:nvSpPr>
-          <p:cNvPr id="3" name="Symbol zastępczy notatek 2">
-            <a:extLst>
-              <a:ext uri="{FF2B5EF4-FFF2-40B4-BE49-F238E27FC236}">
-                <a16:creationId xmlns:a16="http://schemas.microsoft.com/office/drawing/2014/main" id="{93FB756C-3759-31CB-E3EF-68D6D27412BD}"/>
-              </a:ext>
-            </a:extLst>
-          </p:cNvPr>
-          <p:cNvSpPr>
-            <a:spLocks noGrp="1"/>
-          </p:cNvSpPr>
-          <p:nvPr>
-            <p:ph type="body" idx="1"/>
-          </p:nvPr>
-        </p:nvSpPr>
-        <p:spPr/>
-        <p:txBody>
-          <a:bodyPr/>
-          <a:lstStyle/>
-          <a:p>
-            <a:pPr marL="158750" indent="0">
-              <a:buNone/>
-            </a:pPr>
-            <a:r>
-              <a:rPr lang="pl-PL" dirty="0"/>
-              <a:t>BNI+ Obserwator</a:t>
-            </a:r>
-          </a:p>
-        </p:txBody>
-      </p:sp>
-      <p:sp>
-        <p:nvSpPr>
-          <p:cNvPr id="4" name="Symbol zastępczy numeru slajdu 3">
-            <a:extLst>
-              <a:ext uri="{FF2B5EF4-FFF2-40B4-BE49-F238E27FC236}">
-                <a16:creationId xmlns:a16="http://schemas.microsoft.com/office/drawing/2014/main" id="{FDDEBFFB-AA3A-9E30-FA4F-7A2F1CA920CF}"/>
-              </a:ext>
-            </a:extLst>
-          </p:cNvPr>
-          <p:cNvSpPr>
-            <a:spLocks noGrp="1"/>
-          </p:cNvSpPr>
-          <p:nvPr>
-            <p:ph type="sldNum" sz="quarter" idx="5"/>
-          </p:nvPr>
-        </p:nvSpPr>
-        <p:spPr/>
-        <p:txBody>
-          <a:bodyPr/>
-          <a:lstStyle/>
-          <a:p>
-            <a:fld id="{AA97F24F-3328-48D6-A448-1F10CC05B6F2}" type="slidenum">
-              <a:rPr lang="pl-PL" smtClean="0"/>
-              <a:t>4</a:t>
-            </a:fld>
-            <a:endParaRPr lang="pl-PL"/>
-          </a:p>
-        </p:txBody>
-      </p:sp>
-    </p:spTree>
-    <p:extLst>
-      <p:ext uri="{BB962C8B-B14F-4D97-AF65-F5344CB8AC3E}">
-        <p14:creationId xmlns:p14="http://schemas.microsoft.com/office/powerpoint/2010/main" val="3043523997"/>
-      </p:ext>
-    </p:extLst>
-  </p:cSld>
-  <p:clrMapOvr>
-    <a:masterClrMapping/>
-  </p:clrMapOvr>
-</p:notes>
-</file>
-
-<file path=ppt/notesSlides/notesSlide5.xml><?xml version="1.0" encoding="utf-8"?>
 <p:notes xmlns:a="http://schemas.openxmlformats.org/drawingml/2006/main" xmlns:r="http://schemas.openxmlformats.org/officeDocument/2006/relationships" xmlns:p="http://schemas.openxmlformats.org/presentationml/2006/main" showMasterSp="0" showMasterPhAnim="0">
   <p:cSld>
     <p:spTree>
@@ -12448,522 +12216,6 @@
   <p:cSld>
     <p:spTree>
       <p:nvGrpSpPr>
-        <p:cNvPr id="1" name="">
-          <a:extLst>
-            <a:ext uri="{FF2B5EF4-FFF2-40B4-BE49-F238E27FC236}">
-              <a16:creationId xmlns:a16="http://schemas.microsoft.com/office/drawing/2014/main" id="{02CA7327-AF02-90D0-E84C-49F593793F70}"/>
-            </a:ext>
-          </a:extLst>
-        </p:cNvPr>
-        <p:cNvGrpSpPr/>
-        <p:nvPr/>
-      </p:nvGrpSpPr>
-      <p:grpSpPr>
-        <a:xfrm>
-          <a:off x="0" y="0"/>
-          <a:ext cx="0" cy="0"/>
-          <a:chOff x="0" y="0"/>
-          <a:chExt cx="0" cy="0"/>
-        </a:xfrm>
-      </p:grpSpPr>
-      <p:sp>
-        <p:nvSpPr>
-          <p:cNvPr id="7" name="pole tekstowe 6">
-            <a:extLst>
-              <a:ext uri="{FF2B5EF4-FFF2-40B4-BE49-F238E27FC236}">
-                <a16:creationId xmlns:a16="http://schemas.microsoft.com/office/drawing/2014/main" id="{49C6FFDC-9854-AAEE-EDC7-D1FEB2DC6A54}"/>
-              </a:ext>
-            </a:extLst>
-          </p:cNvPr>
-          <p:cNvSpPr txBox="1"/>
-          <p:nvPr/>
-        </p:nvSpPr>
-        <p:spPr>
-          <a:xfrm>
-            <a:off x="0" y="2756610"/>
-            <a:ext cx="9053740" cy="730969"/>
-          </a:xfrm>
-          <a:prstGeom prst="rect">
-            <a:avLst/>
-          </a:prstGeom>
-          <a:noFill/>
-        </p:spPr>
-        <p:txBody>
-          <a:bodyPr wrap="square" rtlCol="0">
-            <a:spAutoFit/>
-          </a:bodyPr>
-          <a:lstStyle/>
-          <a:p>
-            <a:pPr algn="ctr" defTabSz="2710464">
-              <a:buClrTx/>
-              <a:defRPr/>
-            </a:pPr>
-            <a:r>
-              <a:rPr lang="pl-PL" sz="4150" b="1" dirty="0">
-                <a:latin typeface="Arial" panose="020B0604020202020204" pitchFamily="34" charset="0"/>
-                <a:cs typeface="Arial" panose="020B0604020202020204" pitchFamily="34" charset="0"/>
-              </a:rPr>
-              <a:t>{{branża}}</a:t>
-            </a:r>
-            <a:endParaRPr lang="pl-PL" sz="4150" b="1" dirty="0">
-              <a:solidFill>
-                <a:sysClr val="windowText" lastClr="000000"/>
-              </a:solidFill>
-              <a:latin typeface="Arial" panose="020B0604020202020204" pitchFamily="34" charset="0"/>
-              <a:cs typeface="Arial" panose="020B0604020202020204" pitchFamily="34" charset="0"/>
-            </a:endParaRPr>
-          </a:p>
-        </p:txBody>
-      </p:sp>
-      <p:sp>
-        <p:nvSpPr>
-          <p:cNvPr id="6" name="pole tekstowe 5">
-            <a:extLst>
-              <a:ext uri="{FF2B5EF4-FFF2-40B4-BE49-F238E27FC236}">
-                <a16:creationId xmlns:a16="http://schemas.microsoft.com/office/drawing/2014/main" id="{F09E154C-8915-968C-4303-7C5F34BF3421}"/>
-              </a:ext>
-            </a:extLst>
-          </p:cNvPr>
-          <p:cNvSpPr txBox="1"/>
-          <p:nvPr/>
-        </p:nvSpPr>
-        <p:spPr>
-          <a:xfrm>
-            <a:off x="18823" y="1504353"/>
-            <a:ext cx="9034917" cy="1004570"/>
-          </a:xfrm>
-          <a:prstGeom prst="rect">
-            <a:avLst/>
-          </a:prstGeom>
-          <a:noFill/>
-        </p:spPr>
-        <p:txBody>
-          <a:bodyPr wrap="square" rtlCol="0">
-            <a:spAutoFit/>
-          </a:bodyPr>
-          <a:lstStyle/>
-          <a:p>
-            <a:pPr algn="ctr" defTabSz="2710464">
-              <a:buClrTx/>
-              <a:defRPr/>
-            </a:pPr>
-            <a:r>
-              <a:rPr lang="pl-PL" sz="5928" b="1" dirty="0">
-                <a:solidFill>
-                  <a:srgbClr val="D7182A"/>
-                </a:solidFill>
-              </a:rPr>
-              <a:t>{{Imię}} {{Nazwisko}}</a:t>
-            </a:r>
-          </a:p>
-        </p:txBody>
-      </p:sp>
-      <p:sp>
-        <p:nvSpPr>
-          <p:cNvPr id="8" name="pole tekstowe 7">
-            <a:extLst>
-              <a:ext uri="{FF2B5EF4-FFF2-40B4-BE49-F238E27FC236}">
-                <a16:creationId xmlns:a16="http://schemas.microsoft.com/office/drawing/2014/main" id="{C0BC620B-493C-713D-2F3E-88A03C7B8A9D}"/>
-              </a:ext>
-            </a:extLst>
-          </p:cNvPr>
-          <p:cNvSpPr txBox="1"/>
-          <p:nvPr/>
-        </p:nvSpPr>
-        <p:spPr>
-          <a:xfrm>
-            <a:off x="-1" y="3487579"/>
-            <a:ext cx="9072563" cy="730969"/>
-          </a:xfrm>
-          <a:prstGeom prst="rect">
-            <a:avLst/>
-          </a:prstGeom>
-          <a:noFill/>
-        </p:spPr>
-        <p:txBody>
-          <a:bodyPr wrap="square" rtlCol="0">
-            <a:spAutoFit/>
-          </a:bodyPr>
-          <a:lstStyle/>
-          <a:p>
-            <a:pPr algn="ctr" defTabSz="2710464">
-              <a:buClrTx/>
-              <a:defRPr/>
-            </a:pPr>
-            <a:r>
-              <a:rPr lang="pl-PL" sz="4150" dirty="0">
-                <a:solidFill>
-                  <a:sysClr val="windowText" lastClr="000000"/>
-                </a:solidFill>
-                <a:latin typeface="Arial" panose="020B0604020202020204" pitchFamily="34" charset="0"/>
-                <a:cs typeface="Arial" panose="020B0604020202020204" pitchFamily="34" charset="0"/>
-              </a:rPr>
-              <a:t>{{Nazwa firmy}}</a:t>
-            </a:r>
-          </a:p>
-        </p:txBody>
-      </p:sp>
-      <p:pic>
-        <p:nvPicPr>
-          <p:cNvPr id="3" name="Obraz 2">
-            <a:extLst>
-              <a:ext uri="{FF2B5EF4-FFF2-40B4-BE49-F238E27FC236}">
-                <a16:creationId xmlns:a16="http://schemas.microsoft.com/office/drawing/2014/main" id="{D5835E0D-0BB6-FA3B-DAE3-D5151B2C3EA8}"/>
-              </a:ext>
-            </a:extLst>
-          </p:cNvPr>
-          <p:cNvPicPr>
-            <a:picLocks noChangeAspect="1"/>
-          </p:cNvPicPr>
-          <p:nvPr/>
-        </p:nvPicPr>
-        <p:blipFill>
-          <a:blip r:embed="rId3"/>
-          <a:stretch>
-            <a:fillRect/>
-          </a:stretch>
-        </p:blipFill>
-        <p:spPr>
-          <a:xfrm>
-            <a:off x="408868" y="431636"/>
-            <a:ext cx="2020451" cy="571247"/>
-          </a:xfrm>
-          <a:prstGeom prst="rect">
-            <a:avLst/>
-          </a:prstGeom>
-        </p:spPr>
-      </p:pic>
-      <p:sp>
-        <p:nvSpPr>
-          <p:cNvPr id="2" name="Prostokąt 1">
-            <a:extLst>
-              <a:ext uri="{FF2B5EF4-FFF2-40B4-BE49-F238E27FC236}">
-                <a16:creationId xmlns:a16="http://schemas.microsoft.com/office/drawing/2014/main" id="{8E756070-19EC-B969-24C6-0894096B3578}"/>
-              </a:ext>
-            </a:extLst>
-          </p:cNvPr>
-          <p:cNvSpPr/>
-          <p:nvPr/>
-        </p:nvSpPr>
-        <p:spPr>
-          <a:xfrm>
-            <a:off x="-1" y="4993619"/>
-            <a:ext cx="9091387" cy="838856"/>
-          </a:xfrm>
-          <a:prstGeom prst="rect">
-            <a:avLst/>
-          </a:prstGeom>
-          <a:solidFill>
-            <a:srgbClr val="6A6A6A"/>
-          </a:solidFill>
-          <a:ln>
-            <a:noFill/>
-          </a:ln>
-        </p:spPr>
-        <p:style>
-          <a:lnRef idx="2">
-            <a:schemeClr val="accent1">
-              <a:shade val="15000"/>
-            </a:schemeClr>
-          </a:lnRef>
-          <a:fillRef idx="1">
-            <a:schemeClr val="accent1"/>
-          </a:fillRef>
-          <a:effectRef idx="0">
-            <a:schemeClr val="accent1"/>
-          </a:effectRef>
-          <a:fontRef idx="minor">
-            <a:schemeClr val="lt1"/>
-          </a:fontRef>
-        </p:style>
-        <p:txBody>
-          <a:bodyPr rtlCol="0" anchor="ctr"/>
-          <a:lstStyle/>
-          <a:p>
-            <a:pPr algn="ctr"/>
-            <a:r>
-              <a:rPr lang="pl-PL" sz="4400" b="1" dirty="0"/>
-              <a:t>GOŚĆ</a:t>
-            </a:r>
-          </a:p>
-        </p:txBody>
-      </p:sp>
-    </p:spTree>
-    <p:extLst>
-      <p:ext uri="{BB962C8B-B14F-4D97-AF65-F5344CB8AC3E}">
-        <p14:creationId xmlns:p14="http://schemas.microsoft.com/office/powerpoint/2010/main" val="3531637373"/>
-      </p:ext>
-    </p:extLst>
-  </p:cSld>
-  <p:clrMapOvr>
-    <a:masterClrMapping/>
-  </p:clrMapOvr>
-</p:sld>
-</file>
-
-<file path=ppt/slides/slide4.xml><?xml version="1.0" encoding="utf-8"?>
-<p:sld xmlns:a="http://schemas.openxmlformats.org/drawingml/2006/main" xmlns:r="http://schemas.openxmlformats.org/officeDocument/2006/relationships" xmlns:p="http://schemas.openxmlformats.org/presentationml/2006/main">
-  <p:cSld>
-    <p:spTree>
-      <p:nvGrpSpPr>
-        <p:cNvPr id="1" name="">
-          <a:extLst>
-            <a:ext uri="{FF2B5EF4-FFF2-40B4-BE49-F238E27FC236}">
-              <a16:creationId xmlns:a16="http://schemas.microsoft.com/office/drawing/2014/main" id="{1D5B8A73-45A0-3E1F-8216-B5AF92886A60}"/>
-            </a:ext>
-          </a:extLst>
-        </p:cNvPr>
-        <p:cNvGrpSpPr/>
-        <p:nvPr/>
-      </p:nvGrpSpPr>
-      <p:grpSpPr>
-        <a:xfrm>
-          <a:off x="0" y="0"/>
-          <a:ext cx="0" cy="0"/>
-          <a:chOff x="0" y="0"/>
-          <a:chExt cx="0" cy="0"/>
-        </a:xfrm>
-      </p:grpSpPr>
-      <p:sp>
-        <p:nvSpPr>
-          <p:cNvPr id="7" name="pole tekstowe 6">
-            <a:extLst>
-              <a:ext uri="{FF2B5EF4-FFF2-40B4-BE49-F238E27FC236}">
-                <a16:creationId xmlns:a16="http://schemas.microsoft.com/office/drawing/2014/main" id="{B39579CD-2B96-E093-9B42-BAF159F82076}"/>
-              </a:ext>
-            </a:extLst>
-          </p:cNvPr>
-          <p:cNvSpPr txBox="1"/>
-          <p:nvPr/>
-        </p:nvSpPr>
-        <p:spPr>
-          <a:xfrm>
-            <a:off x="0" y="2756610"/>
-            <a:ext cx="9053740" cy="730969"/>
-          </a:xfrm>
-          <a:prstGeom prst="rect">
-            <a:avLst/>
-          </a:prstGeom>
-          <a:noFill/>
-        </p:spPr>
-        <p:txBody>
-          <a:bodyPr wrap="square" rtlCol="0">
-            <a:spAutoFit/>
-          </a:bodyPr>
-          <a:lstStyle/>
-          <a:p>
-            <a:pPr algn="ctr" defTabSz="2710464">
-              <a:buClrTx/>
-              <a:defRPr/>
-            </a:pPr>
-            <a:r>
-              <a:rPr lang="pl-PL" sz="4150" b="1" dirty="0">
-                <a:latin typeface="Arial" panose="020B0604020202020204" pitchFamily="34" charset="0"/>
-                <a:cs typeface="Arial" panose="020B0604020202020204" pitchFamily="34" charset="0"/>
-              </a:rPr>
-              <a:t>{{branża}}</a:t>
-            </a:r>
-            <a:endParaRPr lang="pl-PL" sz="4150" b="1" dirty="0">
-              <a:solidFill>
-                <a:sysClr val="windowText" lastClr="000000"/>
-              </a:solidFill>
-              <a:latin typeface="Arial" panose="020B0604020202020204" pitchFamily="34" charset="0"/>
-              <a:cs typeface="Arial" panose="020B0604020202020204" pitchFamily="34" charset="0"/>
-            </a:endParaRPr>
-          </a:p>
-        </p:txBody>
-      </p:sp>
-      <p:sp>
-        <p:nvSpPr>
-          <p:cNvPr id="6" name="pole tekstowe 5">
-            <a:extLst>
-              <a:ext uri="{FF2B5EF4-FFF2-40B4-BE49-F238E27FC236}">
-                <a16:creationId xmlns:a16="http://schemas.microsoft.com/office/drawing/2014/main" id="{7CADE30F-3997-1DA2-9A9B-A60BC9D2932A}"/>
-              </a:ext>
-            </a:extLst>
-          </p:cNvPr>
-          <p:cNvSpPr txBox="1"/>
-          <p:nvPr/>
-        </p:nvSpPr>
-        <p:spPr>
-          <a:xfrm>
-            <a:off x="18823" y="1504353"/>
-            <a:ext cx="9034917" cy="1004570"/>
-          </a:xfrm>
-          <a:prstGeom prst="rect">
-            <a:avLst/>
-          </a:prstGeom>
-          <a:noFill/>
-        </p:spPr>
-        <p:txBody>
-          <a:bodyPr wrap="square" rtlCol="0">
-            <a:spAutoFit/>
-          </a:bodyPr>
-          <a:lstStyle/>
-          <a:p>
-            <a:pPr algn="ctr" defTabSz="2710464">
-              <a:buClrTx/>
-              <a:defRPr/>
-            </a:pPr>
-            <a:r>
-              <a:rPr lang="pl-PL" sz="5928" b="1" dirty="0">
-                <a:solidFill>
-                  <a:srgbClr val="D7182A"/>
-                </a:solidFill>
-              </a:rPr>
-              <a:t>{{Imię}} {{Nazwisko}}</a:t>
-            </a:r>
-          </a:p>
-        </p:txBody>
-      </p:sp>
-      <p:sp>
-        <p:nvSpPr>
-          <p:cNvPr id="8" name="pole tekstowe 7">
-            <a:extLst>
-              <a:ext uri="{FF2B5EF4-FFF2-40B4-BE49-F238E27FC236}">
-                <a16:creationId xmlns:a16="http://schemas.microsoft.com/office/drawing/2014/main" id="{9F990602-B42A-2A85-7898-E4FD2DBAC120}"/>
-              </a:ext>
-            </a:extLst>
-          </p:cNvPr>
-          <p:cNvSpPr txBox="1"/>
-          <p:nvPr/>
-        </p:nvSpPr>
-        <p:spPr>
-          <a:xfrm>
-            <a:off x="-1" y="3487579"/>
-            <a:ext cx="9072563" cy="730969"/>
-          </a:xfrm>
-          <a:prstGeom prst="rect">
-            <a:avLst/>
-          </a:prstGeom>
-          <a:noFill/>
-        </p:spPr>
-        <p:txBody>
-          <a:bodyPr wrap="square" rtlCol="0">
-            <a:spAutoFit/>
-          </a:bodyPr>
-          <a:lstStyle/>
-          <a:p>
-            <a:pPr algn="ctr" defTabSz="2710464">
-              <a:buClrTx/>
-              <a:defRPr/>
-            </a:pPr>
-            <a:r>
-              <a:rPr lang="pl-PL" sz="4150" dirty="0">
-                <a:solidFill>
-                  <a:sysClr val="windowText" lastClr="000000"/>
-                </a:solidFill>
-                <a:latin typeface="Arial" panose="020B0604020202020204" pitchFamily="34" charset="0"/>
-                <a:cs typeface="Arial" panose="020B0604020202020204" pitchFamily="34" charset="0"/>
-              </a:rPr>
-              <a:t>{{Nazwa firmy}}</a:t>
-            </a:r>
-          </a:p>
-        </p:txBody>
-      </p:sp>
-      <p:pic>
-        <p:nvPicPr>
-          <p:cNvPr id="3" name="Obraz 2">
-            <a:extLst>
-              <a:ext uri="{FF2B5EF4-FFF2-40B4-BE49-F238E27FC236}">
-                <a16:creationId xmlns:a16="http://schemas.microsoft.com/office/drawing/2014/main" id="{B96D8BFE-9088-20BB-2C5A-62B430B09716}"/>
-              </a:ext>
-            </a:extLst>
-          </p:cNvPr>
-          <p:cNvPicPr>
-            <a:picLocks noChangeAspect="1"/>
-          </p:cNvPicPr>
-          <p:nvPr/>
-        </p:nvPicPr>
-        <p:blipFill>
-          <a:blip r:embed="rId3"/>
-          <a:stretch>
-            <a:fillRect/>
-          </a:stretch>
-        </p:blipFill>
-        <p:spPr>
-          <a:xfrm>
-            <a:off x="408868" y="431636"/>
-            <a:ext cx="2020451" cy="571247"/>
-          </a:xfrm>
-          <a:prstGeom prst="rect">
-            <a:avLst/>
-          </a:prstGeom>
-        </p:spPr>
-      </p:pic>
-      <p:sp>
-        <p:nvSpPr>
-          <p:cNvPr id="2" name="Prostokąt 1">
-            <a:extLst>
-              <a:ext uri="{FF2B5EF4-FFF2-40B4-BE49-F238E27FC236}">
-                <a16:creationId xmlns:a16="http://schemas.microsoft.com/office/drawing/2014/main" id="{8AD80368-5CA7-F821-1A50-D7E7F48E333C}"/>
-              </a:ext>
-            </a:extLst>
-          </p:cNvPr>
-          <p:cNvSpPr/>
-          <p:nvPr/>
-        </p:nvSpPr>
-        <p:spPr>
-          <a:xfrm>
-            <a:off x="-1" y="4993619"/>
-            <a:ext cx="9091387" cy="838856"/>
-          </a:xfrm>
-          <a:prstGeom prst="rect">
-            <a:avLst/>
-          </a:prstGeom>
-          <a:solidFill>
-            <a:srgbClr val="6A6A6A"/>
-          </a:solidFill>
-          <a:ln>
-            <a:noFill/>
-          </a:ln>
-        </p:spPr>
-        <p:style>
-          <a:lnRef idx="2">
-            <a:schemeClr val="accent1">
-              <a:shade val="15000"/>
-            </a:schemeClr>
-          </a:lnRef>
-          <a:fillRef idx="1">
-            <a:schemeClr val="accent1"/>
-          </a:fillRef>
-          <a:effectRef idx="0">
-            <a:schemeClr val="accent1"/>
-          </a:effectRef>
-          <a:fontRef idx="minor">
-            <a:schemeClr val="lt1"/>
-          </a:fontRef>
-        </p:style>
-        <p:txBody>
-          <a:bodyPr rtlCol="0" anchor="ctr"/>
-          <a:lstStyle/>
-          <a:p>
-            <a:pPr algn="ctr"/>
-            <a:r>
-              <a:rPr lang="pl-PL" sz="4400" b="1" dirty="0"/>
-              <a:t>OBSERWATOR</a:t>
-            </a:r>
-          </a:p>
-        </p:txBody>
-      </p:sp>
-    </p:spTree>
-    <p:extLst>
-      <p:ext uri="{BB962C8B-B14F-4D97-AF65-F5344CB8AC3E}">
-        <p14:creationId xmlns:p14="http://schemas.microsoft.com/office/powerpoint/2010/main" val="4032356528"/>
-      </p:ext>
-    </p:extLst>
-  </p:cSld>
-  <p:clrMapOvr>
-    <a:masterClrMapping/>
-  </p:clrMapOvr>
-</p:sld>
-</file>
-
-<file path=ppt/slides/slide5.xml><?xml version="1.0" encoding="utf-8"?>
-<p:sld xmlns:a="http://schemas.openxmlformats.org/drawingml/2006/main" xmlns:r="http://schemas.openxmlformats.org/officeDocument/2006/relationships" xmlns:p="http://schemas.openxmlformats.org/presentationml/2006/main">
-  <p:cSld>
-    <p:spTree>
-      <p:nvGrpSpPr>
         <p:cNvPr id="1" name="Shape 95">
           <a:extLst>
             <a:ext uri="{FF2B5EF4-FFF2-40B4-BE49-F238E27FC236}">

--- a/Badge CC.pptx
+++ b/Badge CC.pptx
@@ -265,7 +265,7 @@
       <p15:sldGuideLst xmlns:p15="http://schemas.microsoft.com/office/powerpoint/2012/main"/>
     </p:ext>
     <p:ext uri="GoogleSlidesCustomDataVersion2">
-      <go:slidesCustomData xmlns:go="http://customooxmlschemas.google.com/" xmlns:ahyp="http://schemas.microsoft.com/office/drawing/2018/hyperlinkcolor" xmlns:p15="http://schemas.microsoft.com/office/powerpoint/2012/main" xmlns:p14="http://schemas.microsoft.com/office/powerpoint/2010/main" xmlns:com="http://schemas.openxmlformats.org/drawingml/2006/compatibility" xmlns:pvml="urn:schemas-microsoft-com:office:powerpoint" xmlns:v="urn:schemas-microsoft-com:vml" xmlns:o="urn:schemas-microsoft-com:office:office" xmlns:dgm="http://schemas.openxmlformats.org/drawingml/2006/diagram" xmlns:c="http://schemas.openxmlformats.org/drawingml/2006/chart" xmlns:mv="urn:schemas-microsoft-com:mac:vml" xmlns:mc="http://schemas.openxmlformats.org/markup-compatibility/2006" xmlns="" r:id="rId63" roundtripDataSignature="AMtx7miUS1/sxxL4JgbZEnfhDFKesaJ+9Q=="/>
+      <go:slidesCustomData xmlns="" xmlns:mc="http://schemas.openxmlformats.org/markup-compatibility/2006" xmlns:mv="urn:schemas-microsoft-com:mac:vml" xmlns:c="http://schemas.openxmlformats.org/drawingml/2006/chart" xmlns:dgm="http://schemas.openxmlformats.org/drawingml/2006/diagram" xmlns:o="urn:schemas-microsoft-com:office:office" xmlns:v="urn:schemas-microsoft-com:vml" xmlns:pvml="urn:schemas-microsoft-com:office:powerpoint" xmlns:com="http://schemas.openxmlformats.org/drawingml/2006/compatibility" xmlns:p14="http://schemas.microsoft.com/office/powerpoint/2010/main" xmlns:p15="http://schemas.microsoft.com/office/powerpoint/2012/main" xmlns:ahyp="http://schemas.microsoft.com/office/drawing/2018/hyperlinkcolor" xmlns:go="http://customooxmlschemas.google.com/" r:id="rId63" roundtripDataSignature="AMtx7miUS1/sxxL4JgbZEnfhDFKesaJ+9Q=="/>
     </p:ext>
   </p:extLst>
 </p:presentation>
@@ -284,18 +284,18 @@
   <pc:docChgLst>
     <pc:chgData name="Patryk Wyczółkowski - The Company" userId="288d461d-eaab-4b00-b800-aa4e5a28dfe6" providerId="ADAL" clId="{023E43D6-DC3E-4706-BB42-F0DBAC8333BE}"/>
     <pc:docChg chg="undo custSel addSld delSld modSld sldOrd addSection modSection">
-      <pc:chgData name="Patryk Wyczółkowski - The Company" userId="288d461d-eaab-4b00-b800-aa4e5a28dfe6" providerId="ADAL" clId="{023E43D6-DC3E-4706-BB42-F0DBAC8333BE}" dt="2026-04-04T17:32:12.531" v="199" actId="47"/>
+      <pc:chgData name="Patryk Wyczółkowski - The Company" userId="288d461d-eaab-4b00-b800-aa4e5a28dfe6" providerId="ADAL" clId="{023E43D6-DC3E-4706-BB42-F0DBAC8333BE}" dt="2026-04-04T17:43:20.167" v="238" actId="20577"/>
       <pc:docMkLst>
         <pc:docMk/>
       </pc:docMkLst>
       <pc:sldChg chg="addSp modSp mod modNotesTx">
-        <pc:chgData name="Patryk Wyczółkowski - The Company" userId="288d461d-eaab-4b00-b800-aa4e5a28dfe6" providerId="ADAL" clId="{023E43D6-DC3E-4706-BB42-F0DBAC8333BE}" dt="2026-04-04T14:16:55.928" v="117" actId="20577"/>
+        <pc:chgData name="Patryk Wyczółkowski - The Company" userId="288d461d-eaab-4b00-b800-aa4e5a28dfe6" providerId="ADAL" clId="{023E43D6-DC3E-4706-BB42-F0DBAC8333BE}" dt="2026-04-04T17:43:16.301" v="236" actId="20577"/>
         <pc:sldMkLst>
           <pc:docMk/>
           <pc:sldMk cId="1622968975" sldId="295"/>
         </pc:sldMkLst>
         <pc:spChg chg="add mod">
-          <ac:chgData name="Patryk Wyczółkowski - The Company" userId="288d461d-eaab-4b00-b800-aa4e5a28dfe6" providerId="ADAL" clId="{023E43D6-DC3E-4706-BB42-F0DBAC8333BE}" dt="2026-04-04T11:57:00.969" v="98" actId="14100"/>
+          <ac:chgData name="Patryk Wyczółkowski - The Company" userId="288d461d-eaab-4b00-b800-aa4e5a28dfe6" providerId="ADAL" clId="{023E43D6-DC3E-4706-BB42-F0DBAC8333BE}" dt="2026-04-04T17:43:16.301" v="236" actId="20577"/>
           <ac:spMkLst>
             <pc:docMk/>
             <pc:sldMk cId="1622968975" sldId="295"/>
@@ -311,7 +311,7 @@
           </ac:spMkLst>
         </pc:spChg>
         <pc:spChg chg="mod">
-          <ac:chgData name="Patryk Wyczółkowski - The Company" userId="288d461d-eaab-4b00-b800-aa4e5a28dfe6" providerId="ADAL" clId="{023E43D6-DC3E-4706-BB42-F0DBAC8333BE}" dt="2026-04-04T11:55:50.471" v="31" actId="20577"/>
+          <ac:chgData name="Patryk Wyczółkowski - The Company" userId="288d461d-eaab-4b00-b800-aa4e5a28dfe6" providerId="ADAL" clId="{023E43D6-DC3E-4706-BB42-F0DBAC8333BE}" dt="2026-04-04T17:41:54.139" v="208" actId="20577"/>
           <ac:spMkLst>
             <pc:docMk/>
             <pc:sldMk cId="1622968975" sldId="295"/>
@@ -319,7 +319,7 @@
           </ac:spMkLst>
         </pc:spChg>
         <pc:spChg chg="mod">
-          <ac:chgData name="Patryk Wyczółkowski - The Company" userId="288d461d-eaab-4b00-b800-aa4e5a28dfe6" providerId="ADAL" clId="{023E43D6-DC3E-4706-BB42-F0DBAC8333BE}" dt="2026-04-04T11:56:07.789" v="58" actId="20577"/>
+          <ac:chgData name="Patryk Wyczółkowski - The Company" userId="288d461d-eaab-4b00-b800-aa4e5a28dfe6" providerId="ADAL" clId="{023E43D6-DC3E-4706-BB42-F0DBAC8333BE}" dt="2026-04-04T17:41:59.353" v="212" actId="20577"/>
           <ac:spMkLst>
             <pc:docMk/>
             <pc:sldMk cId="1622968975" sldId="295"/>
@@ -327,7 +327,7 @@
           </ac:spMkLst>
         </pc:spChg>
         <pc:spChg chg="mod">
-          <ac:chgData name="Patryk Wyczółkowski - The Company" userId="288d461d-eaab-4b00-b800-aa4e5a28dfe6" providerId="ADAL" clId="{023E43D6-DC3E-4706-BB42-F0DBAC8333BE}" dt="2026-04-04T11:55:59.221" v="44" actId="20577"/>
+          <ac:chgData name="Patryk Wyczółkowski - The Company" userId="288d461d-eaab-4b00-b800-aa4e5a28dfe6" providerId="ADAL" clId="{023E43D6-DC3E-4706-BB42-F0DBAC8333BE}" dt="2026-04-04T17:41:57.308" v="210" actId="20577"/>
           <ac:spMkLst>
             <pc:docMk/>
             <pc:sldMk cId="1622968975" sldId="295"/>
@@ -336,11 +336,35 @@
         </pc:spChg>
       </pc:sldChg>
       <pc:sldChg chg="addSp modSp add mod modNotesTx">
-        <pc:chgData name="Patryk Wyczółkowski - The Company" userId="288d461d-eaab-4b00-b800-aa4e5a28dfe6" providerId="ADAL" clId="{023E43D6-DC3E-4706-BB42-F0DBAC8333BE}" dt="2026-04-04T14:17:00.344" v="122" actId="20577"/>
+        <pc:chgData name="Patryk Wyczółkowski - The Company" userId="288d461d-eaab-4b00-b800-aa4e5a28dfe6" providerId="ADAL" clId="{023E43D6-DC3E-4706-BB42-F0DBAC8333BE}" dt="2026-04-04T17:43:09.434" v="234" actId="255"/>
         <pc:sldMkLst>
           <pc:docMk/>
           <pc:sldMk cId="1185325920" sldId="302"/>
         </pc:sldMkLst>
+        <pc:spChg chg="mod">
+          <ac:chgData name="Patryk Wyczółkowski - The Company" userId="288d461d-eaab-4b00-b800-aa4e5a28dfe6" providerId="ADAL" clId="{023E43D6-DC3E-4706-BB42-F0DBAC8333BE}" dt="2026-04-04T17:43:09.434" v="234" actId="255"/>
+          <ac:spMkLst>
+            <pc:docMk/>
+            <pc:sldMk cId="1185325920" sldId="302"/>
+            <ac:spMk id="6" creationId="{9AF2D14D-236E-8047-E7B5-D5B324DE5468}"/>
+          </ac:spMkLst>
+        </pc:spChg>
+        <pc:spChg chg="mod">
+          <ac:chgData name="Patryk Wyczółkowski - The Company" userId="288d461d-eaab-4b00-b800-aa4e5a28dfe6" providerId="ADAL" clId="{023E43D6-DC3E-4706-BB42-F0DBAC8333BE}" dt="2026-04-04T17:42:59.834" v="233" actId="255"/>
+          <ac:spMkLst>
+            <pc:docMk/>
+            <pc:sldMk cId="1185325920" sldId="302"/>
+            <ac:spMk id="7" creationId="{989029B6-ECA3-BFB4-6186-C53DCC0BF5E9}"/>
+          </ac:spMkLst>
+        </pc:spChg>
+        <pc:spChg chg="mod">
+          <ac:chgData name="Patryk Wyczółkowski - The Company" userId="288d461d-eaab-4b00-b800-aa4e5a28dfe6" providerId="ADAL" clId="{023E43D6-DC3E-4706-BB42-F0DBAC8333BE}" dt="2026-04-04T17:42:55.383" v="232" actId="255"/>
+          <ac:spMkLst>
+            <pc:docMk/>
+            <pc:sldMk cId="1185325920" sldId="302"/>
+            <ac:spMk id="8" creationId="{C004B6BF-E514-D930-38E5-590BD4B149C0}"/>
+          </ac:spMkLst>
+        </pc:spChg>
         <pc:picChg chg="add mod">
           <ac:chgData name="Patryk Wyczółkowski - The Company" userId="288d461d-eaab-4b00-b800-aa4e5a28dfe6" providerId="ADAL" clId="{023E43D6-DC3E-4706-BB42-F0DBAC8333BE}" dt="2026-04-04T14:12:19.258" v="113" actId="1076"/>
           <ac:picMkLst>
@@ -425,12 +449,44 @@
           </ac:spMkLst>
         </pc:spChg>
       </pc:sldChg>
-      <pc:sldChg chg="add ord modNotesTx">
-        <pc:chgData name="Patryk Wyczółkowski - The Company" userId="288d461d-eaab-4b00-b800-aa4e5a28dfe6" providerId="ADAL" clId="{023E43D6-DC3E-4706-BB42-F0DBAC8333BE}" dt="2026-04-04T14:23:28.108" v="197" actId="20577"/>
+      <pc:sldChg chg="modSp add mod ord modNotesTx">
+        <pc:chgData name="Patryk Wyczółkowski - The Company" userId="288d461d-eaab-4b00-b800-aa4e5a28dfe6" providerId="ADAL" clId="{023E43D6-DC3E-4706-BB42-F0DBAC8333BE}" dt="2026-04-04T17:43:20.167" v="238" actId="20577"/>
         <pc:sldMkLst>
           <pc:docMk/>
           <pc:sldMk cId="1316184106" sldId="305"/>
         </pc:sldMkLst>
+        <pc:spChg chg="mod">
+          <ac:chgData name="Patryk Wyczółkowski - The Company" userId="288d461d-eaab-4b00-b800-aa4e5a28dfe6" providerId="ADAL" clId="{023E43D6-DC3E-4706-BB42-F0DBAC8333BE}" dt="2026-04-04T17:43:20.167" v="238" actId="20577"/>
+          <ac:spMkLst>
+            <pc:docMk/>
+            <pc:sldMk cId="1316184106" sldId="305"/>
+            <ac:spMk id="2" creationId="{23A0477D-21B9-A65B-8CA4-9A7B45F952A3}"/>
+          </ac:spMkLst>
+        </pc:spChg>
+        <pc:spChg chg="mod">
+          <ac:chgData name="Patryk Wyczółkowski - The Company" userId="288d461d-eaab-4b00-b800-aa4e5a28dfe6" providerId="ADAL" clId="{023E43D6-DC3E-4706-BB42-F0DBAC8333BE}" dt="2026-04-04T17:42:09.067" v="218" actId="20577"/>
+          <ac:spMkLst>
+            <pc:docMk/>
+            <pc:sldMk cId="1316184106" sldId="305"/>
+            <ac:spMk id="98" creationId="{2A8E9582-D9E2-4442-B5B8-8BF1AEF490C5}"/>
+          </ac:spMkLst>
+        </pc:spChg>
+        <pc:spChg chg="mod">
+          <ac:chgData name="Patryk Wyczółkowski - The Company" userId="288d461d-eaab-4b00-b800-aa4e5a28dfe6" providerId="ADAL" clId="{023E43D6-DC3E-4706-BB42-F0DBAC8333BE}" dt="2026-04-04T17:42:14.669" v="222" actId="20577"/>
+          <ac:spMkLst>
+            <pc:docMk/>
+            <pc:sldMk cId="1316184106" sldId="305"/>
+            <ac:spMk id="99" creationId="{FBB8D1D6-104C-92E9-79E2-8B7A5A18F731}"/>
+          </ac:spMkLst>
+        </pc:spChg>
+        <pc:spChg chg="mod">
+          <ac:chgData name="Patryk Wyczółkowski - The Company" userId="288d461d-eaab-4b00-b800-aa4e5a28dfe6" providerId="ADAL" clId="{023E43D6-DC3E-4706-BB42-F0DBAC8333BE}" dt="2026-04-04T17:42:12.070" v="220" actId="20577"/>
+          <ac:spMkLst>
+            <pc:docMk/>
+            <pc:sldMk cId="1316184106" sldId="305"/>
+            <ac:spMk id="100" creationId="{1A391E51-F2E1-B61B-8167-D5C52DA531C2}"/>
+          </ac:spMkLst>
+        </pc:spChg>
       </pc:sldChg>
     </pc:docChg>
   </pc:docChgLst>
@@ -11724,7 +11780,7 @@
                   <a:schemeClr val="dk1"/>
                 </a:solidFill>
               </a:rPr>
-              <a:t> {{imię}} </a:t>
+              <a:t> {{Imię}} </a:t>
             </a:r>
             <a:r>
               <a:rPr lang="pl-PL" sz="5800" b="1" dirty="0">
@@ -11732,7 +11788,7 @@
                   <a:schemeClr val="dk1"/>
                 </a:solidFill>
               </a:rPr>
-              <a:t>{{nazwisko}}</a:t>
+              <a:t>{{Nazwisko}}</a:t>
             </a:r>
             <a:endParaRPr sz="5800" dirty="0"/>
           </a:p>
@@ -11784,7 +11840,7 @@
                   <a:schemeClr val="dk1"/>
                 </a:solidFill>
               </a:rPr>
-              <a:t>{{branża}}</a:t>
+              <a:t>{{Branża}}</a:t>
             </a:r>
             <a:endParaRPr lang="pl-PL" sz="800" dirty="0"/>
           </a:p>
@@ -11837,7 +11893,7 @@
                 </a:solidFill>
                 <a:latin typeface="Google Sans"/>
               </a:rPr>
-              <a:t>{{firma}}</a:t>
+              <a:t>{{Firma}}</a:t>
             </a:r>
             <a:endParaRPr lang="pl-PL" dirty="0"/>
           </a:p>
@@ -11947,7 +12003,7 @@
                 <a:cs typeface="Calibri"/>
                 <a:sym typeface="Calibri"/>
               </a:rPr>
-              <a:t>{{grupa}}</a:t>
+              <a:t>{{Grupa}}</a:t>
             </a:r>
           </a:p>
         </p:txBody>
@@ -12002,8 +12058,8 @@
         </p:nvSpPr>
         <p:spPr>
           <a:xfrm>
-            <a:off x="0" y="2975843"/>
-            <a:ext cx="9053740" cy="730969"/>
+            <a:off x="0" y="3938900"/>
+            <a:ext cx="9053740" cy="553998"/>
           </a:xfrm>
           <a:prstGeom prst="rect">
             <a:avLst/>
@@ -12021,13 +12077,13 @@
               <a:defRPr/>
             </a:pPr>
             <a:r>
-              <a:rPr lang="pl-PL" sz="4150" b="1" dirty="0">
+              <a:rPr lang="pl-PL" sz="3000" b="1" dirty="0">
                 <a:latin typeface="Arial" panose="020B0604020202020204" pitchFamily="34" charset="0"/>
                 <a:cs typeface="Arial" panose="020B0604020202020204" pitchFamily="34" charset="0"/>
               </a:rPr>
-              <a:t>{{branża}}</a:t>
+              <a:t>{{Branża}}</a:t>
             </a:r>
-            <a:endParaRPr lang="pl-PL" sz="4150" b="1" dirty="0">
+            <a:endParaRPr lang="pl-PL" sz="3000" b="1" dirty="0">
               <a:solidFill>
                 <a:sysClr val="windowText" lastClr="000000"/>
               </a:solidFill>
@@ -12052,7 +12108,7 @@
         <p:spPr>
           <a:xfrm>
             <a:off x="18823" y="1504353"/>
-            <a:ext cx="9034917" cy="1004570"/>
+            <a:ext cx="9034917" cy="1015663"/>
           </a:xfrm>
           <a:prstGeom prst="rect">
             <a:avLst/>
@@ -12070,7 +12126,7 @@
               <a:defRPr/>
             </a:pPr>
             <a:r>
-              <a:rPr lang="pl-PL" sz="5928" b="1" dirty="0">
+              <a:rPr lang="pl-PL" sz="6000" b="1" dirty="0">
                 <a:solidFill>
                   <a:srgbClr val="D7182A"/>
                 </a:solidFill>
@@ -12094,8 +12150,8 @@
         </p:nvSpPr>
         <p:spPr>
           <a:xfrm>
-            <a:off x="-1" y="4262650"/>
-            <a:ext cx="9072563" cy="730969"/>
+            <a:off x="-1" y="2858427"/>
+            <a:ext cx="9072563" cy="769441"/>
           </a:xfrm>
           <a:prstGeom prst="rect">
             <a:avLst/>
@@ -12113,14 +12169,14 @@
               <a:defRPr/>
             </a:pPr>
             <a:r>
-              <a:rPr lang="pl-PL" sz="4150" dirty="0">
+              <a:rPr lang="pl-PL" sz="4400" dirty="0">
                 <a:solidFill>
                   <a:sysClr val="windowText" lastClr="000000"/>
                 </a:solidFill>
                 <a:latin typeface="Arial" panose="020B0604020202020204" pitchFamily="34" charset="0"/>
                 <a:cs typeface="Arial" panose="020B0604020202020204" pitchFamily="34" charset="0"/>
               </a:rPr>
-              <a:t>{{Nazwa firmy}}</a:t>
+              <a:t>{{Firma}}</a:t>
             </a:r>
           </a:p>
         </p:txBody>
@@ -12367,7 +12423,7 @@
                   <a:schemeClr val="dk1"/>
                 </a:solidFill>
               </a:rPr>
-              <a:t> {{imię}} </a:t>
+              <a:t> {{Imię}} </a:t>
             </a:r>
             <a:r>
               <a:rPr lang="pl-PL" sz="5800" b="1" dirty="0">
@@ -12375,7 +12431,7 @@
                   <a:schemeClr val="dk1"/>
                 </a:solidFill>
               </a:rPr>
-              <a:t>{{nazwisko}}</a:t>
+              <a:t>{{Nazwisko}}</a:t>
             </a:r>
             <a:endParaRPr sz="5800" dirty="0"/>
           </a:p>
@@ -12427,7 +12483,7 @@
                   <a:schemeClr val="dk1"/>
                 </a:solidFill>
               </a:rPr>
-              <a:t>{{branża}}</a:t>
+              <a:t>{{Branża}}</a:t>
             </a:r>
             <a:endParaRPr lang="pl-PL" sz="800" dirty="0"/>
           </a:p>
@@ -12480,7 +12536,7 @@
                 </a:solidFill>
                 <a:latin typeface="Google Sans"/>
               </a:rPr>
-              <a:t>{{firma}}</a:t>
+              <a:t>{{Firma}}</a:t>
             </a:r>
             <a:endParaRPr lang="pl-PL" dirty="0"/>
           </a:p>
@@ -12590,7 +12646,7 @@
                 <a:cs typeface="Calibri"/>
                 <a:sym typeface="Calibri"/>
               </a:rPr>
-              <a:t>{{grupa}}</a:t>
+              <a:t>{{Grupa}}</a:t>
             </a:r>
           </a:p>
         </p:txBody>

--- a/Badge CC.pptx
+++ b/Badge CC.pptx
@@ -265,7 +265,7 @@
       <p15:sldGuideLst xmlns:p15="http://schemas.microsoft.com/office/powerpoint/2012/main"/>
     </p:ext>
     <p:ext uri="GoogleSlidesCustomDataVersion2">
-      <go:slidesCustomData xmlns="" xmlns:mc="http://schemas.openxmlformats.org/markup-compatibility/2006" xmlns:mv="urn:schemas-microsoft-com:mac:vml" xmlns:c="http://schemas.openxmlformats.org/drawingml/2006/chart" xmlns:dgm="http://schemas.openxmlformats.org/drawingml/2006/diagram" xmlns:o="urn:schemas-microsoft-com:office:office" xmlns:v="urn:schemas-microsoft-com:vml" xmlns:pvml="urn:schemas-microsoft-com:office:powerpoint" xmlns:com="http://schemas.openxmlformats.org/drawingml/2006/compatibility" xmlns:p14="http://schemas.microsoft.com/office/powerpoint/2010/main" xmlns:p15="http://schemas.microsoft.com/office/powerpoint/2012/main" xmlns:ahyp="http://schemas.microsoft.com/office/drawing/2018/hyperlinkcolor" xmlns:go="http://customooxmlschemas.google.com/" r:id="rId63" roundtripDataSignature="AMtx7miUS1/sxxL4JgbZEnfhDFKesaJ+9Q=="/>
+      <go:slidesCustomData xmlns:go="http://customooxmlschemas.google.com/" xmlns:ahyp="http://schemas.microsoft.com/office/drawing/2018/hyperlinkcolor" xmlns:p15="http://schemas.microsoft.com/office/powerpoint/2012/main" xmlns:p14="http://schemas.microsoft.com/office/powerpoint/2010/main" xmlns:com="http://schemas.openxmlformats.org/drawingml/2006/compatibility" xmlns:pvml="urn:schemas-microsoft-com:office:powerpoint" xmlns:v="urn:schemas-microsoft-com:vml" xmlns:o="urn:schemas-microsoft-com:office:office" xmlns:dgm="http://schemas.openxmlformats.org/drawingml/2006/diagram" xmlns:c="http://schemas.openxmlformats.org/drawingml/2006/chart" xmlns:mv="urn:schemas-microsoft-com:mac:vml" xmlns:mc="http://schemas.openxmlformats.org/markup-compatibility/2006" xmlns="" r:id="rId63" roundtripDataSignature="AMtx7miUS1/sxxL4JgbZEnfhDFKesaJ+9Q=="/>
     </p:ext>
   </p:extLst>
 </p:presentation>
@@ -284,7 +284,7 @@
   <pc:docChgLst>
     <pc:chgData name="Patryk Wyczółkowski - The Company" userId="288d461d-eaab-4b00-b800-aa4e5a28dfe6" providerId="ADAL" clId="{023E43D6-DC3E-4706-BB42-F0DBAC8333BE}"/>
     <pc:docChg chg="undo custSel addSld delSld modSld sldOrd addSection modSection">
-      <pc:chgData name="Patryk Wyczółkowski - The Company" userId="288d461d-eaab-4b00-b800-aa4e5a28dfe6" providerId="ADAL" clId="{023E43D6-DC3E-4706-BB42-F0DBAC8333BE}" dt="2026-04-04T17:43:20.167" v="238" actId="20577"/>
+      <pc:chgData name="Patryk Wyczółkowski - The Company" userId="288d461d-eaab-4b00-b800-aa4e5a28dfe6" providerId="ADAL" clId="{023E43D6-DC3E-4706-BB42-F0DBAC8333BE}" dt="2026-04-04T18:15:00.189" v="257" actId="1076"/>
       <pc:docMkLst>
         <pc:docMk/>
       </pc:docMkLst>
@@ -335,34 +335,42 @@
           </ac:spMkLst>
         </pc:spChg>
       </pc:sldChg>
-      <pc:sldChg chg="addSp modSp add mod modNotesTx">
-        <pc:chgData name="Patryk Wyczółkowski - The Company" userId="288d461d-eaab-4b00-b800-aa4e5a28dfe6" providerId="ADAL" clId="{023E43D6-DC3E-4706-BB42-F0DBAC8333BE}" dt="2026-04-04T17:43:09.434" v="234" actId="255"/>
+      <pc:sldChg chg="addSp delSp modSp add mod modNotesTx">
+        <pc:chgData name="Patryk Wyczółkowski - The Company" userId="288d461d-eaab-4b00-b800-aa4e5a28dfe6" providerId="ADAL" clId="{023E43D6-DC3E-4706-BB42-F0DBAC8333BE}" dt="2026-04-04T18:15:00.189" v="257" actId="1076"/>
         <pc:sldMkLst>
           <pc:docMk/>
           <pc:sldMk cId="1185325920" sldId="302"/>
         </pc:sldMkLst>
-        <pc:spChg chg="mod">
-          <ac:chgData name="Patryk Wyczółkowski - The Company" userId="288d461d-eaab-4b00-b800-aa4e5a28dfe6" providerId="ADAL" clId="{023E43D6-DC3E-4706-BB42-F0DBAC8333BE}" dt="2026-04-04T17:43:09.434" v="234" actId="255"/>
+        <pc:spChg chg="add del mod">
+          <ac:chgData name="Patryk Wyczółkowski - The Company" userId="288d461d-eaab-4b00-b800-aa4e5a28dfe6" providerId="ADAL" clId="{023E43D6-DC3E-4706-BB42-F0DBAC8333BE}" dt="2026-04-04T18:14:54.690" v="250" actId="6549"/>
           <ac:spMkLst>
             <pc:docMk/>
             <pc:sldMk cId="1185325920" sldId="302"/>
             <ac:spMk id="6" creationId="{9AF2D14D-236E-8047-E7B5-D5B324DE5468}"/>
           </ac:spMkLst>
         </pc:spChg>
-        <pc:spChg chg="mod">
-          <ac:chgData name="Patryk Wyczółkowski - The Company" userId="288d461d-eaab-4b00-b800-aa4e5a28dfe6" providerId="ADAL" clId="{023E43D6-DC3E-4706-BB42-F0DBAC8333BE}" dt="2026-04-04T17:42:59.834" v="233" actId="255"/>
+        <pc:spChg chg="add del mod">
+          <ac:chgData name="Patryk Wyczółkowski - The Company" userId="288d461d-eaab-4b00-b800-aa4e5a28dfe6" providerId="ADAL" clId="{023E43D6-DC3E-4706-BB42-F0DBAC8333BE}" dt="2026-04-04T18:14:54.847" v="251" actId="478"/>
           <ac:spMkLst>
             <pc:docMk/>
             <pc:sldMk cId="1185325920" sldId="302"/>
             <ac:spMk id="7" creationId="{989029B6-ECA3-BFB4-6186-C53DCC0BF5E9}"/>
           </ac:spMkLst>
         </pc:spChg>
-        <pc:spChg chg="mod">
-          <ac:chgData name="Patryk Wyczółkowski - The Company" userId="288d461d-eaab-4b00-b800-aa4e5a28dfe6" providerId="ADAL" clId="{023E43D6-DC3E-4706-BB42-F0DBAC8333BE}" dt="2026-04-04T17:42:55.383" v="232" actId="255"/>
+        <pc:spChg chg="add del mod">
+          <ac:chgData name="Patryk Wyczółkowski - The Company" userId="288d461d-eaab-4b00-b800-aa4e5a28dfe6" providerId="ADAL" clId="{023E43D6-DC3E-4706-BB42-F0DBAC8333BE}" dt="2026-04-04T18:14:54.847" v="251" actId="478"/>
           <ac:spMkLst>
             <pc:docMk/>
             <pc:sldMk cId="1185325920" sldId="302"/>
             <ac:spMk id="8" creationId="{C004B6BF-E514-D930-38E5-590BD4B149C0}"/>
+          </ac:spMkLst>
+        </pc:spChg>
+        <pc:spChg chg="add del mod">
+          <ac:chgData name="Patryk Wyczółkowski - The Company" userId="288d461d-eaab-4b00-b800-aa4e5a28dfe6" providerId="ADAL" clId="{023E43D6-DC3E-4706-BB42-F0DBAC8333BE}" dt="2026-04-04T18:15:00.189" v="257" actId="1076"/>
+          <ac:spMkLst>
+            <pc:docMk/>
+            <pc:sldMk cId="1185325920" sldId="302"/>
+            <ac:spMk id="9" creationId="{4A036F32-92CE-B2C1-ACFB-2FE99C82AA31}"/>
           </ac:spMkLst>
         </pc:spChg>
         <pc:picChg chg="add mod">
@@ -485,6 +493,45 @@
             <pc:docMk/>
             <pc:sldMk cId="1316184106" sldId="305"/>
             <ac:spMk id="100" creationId="{1A391E51-F2E1-B61B-8167-D5C52DA531C2}"/>
+          </ac:spMkLst>
+        </pc:spChg>
+      </pc:sldChg>
+      <pc:sldChg chg="addSp delSp add del mod">
+        <pc:chgData name="Patryk Wyczółkowski - The Company" userId="288d461d-eaab-4b00-b800-aa4e5a28dfe6" providerId="ADAL" clId="{023E43D6-DC3E-4706-BB42-F0DBAC8333BE}" dt="2026-04-04T18:14:56.042" v="256" actId="2890"/>
+        <pc:sldMkLst>
+          <pc:docMk/>
+          <pc:sldMk cId="2717112115" sldId="306"/>
+        </pc:sldMkLst>
+        <pc:spChg chg="add del">
+          <ac:chgData name="Patryk Wyczółkowski - The Company" userId="288d461d-eaab-4b00-b800-aa4e5a28dfe6" providerId="ADAL" clId="{023E43D6-DC3E-4706-BB42-F0DBAC8333BE}" dt="2026-04-04T18:14:54.996" v="252" actId="478"/>
+          <ac:spMkLst>
+            <pc:docMk/>
+            <pc:sldMk cId="2717112115" sldId="306"/>
+            <ac:spMk id="2" creationId="{25D743FC-2651-5272-65D8-338C3B8FD26C}"/>
+          </ac:spMkLst>
+        </pc:spChg>
+        <pc:spChg chg="add del">
+          <ac:chgData name="Patryk Wyczółkowski - The Company" userId="288d461d-eaab-4b00-b800-aa4e5a28dfe6" providerId="ADAL" clId="{023E43D6-DC3E-4706-BB42-F0DBAC8333BE}" dt="2026-04-04T18:14:55.741" v="255" actId="478"/>
+          <ac:spMkLst>
+            <pc:docMk/>
+            <pc:sldMk cId="2717112115" sldId="306"/>
+            <ac:spMk id="98" creationId="{2E2E9F6B-DE18-9230-0746-497C7A4D6A54}"/>
+          </ac:spMkLst>
+        </pc:spChg>
+        <pc:spChg chg="add del">
+          <ac:chgData name="Patryk Wyczółkowski - The Company" userId="288d461d-eaab-4b00-b800-aa4e5a28dfe6" providerId="ADAL" clId="{023E43D6-DC3E-4706-BB42-F0DBAC8333BE}" dt="2026-04-04T18:14:55.178" v="253" actId="478"/>
+          <ac:spMkLst>
+            <pc:docMk/>
+            <pc:sldMk cId="2717112115" sldId="306"/>
+            <ac:spMk id="99" creationId="{FF874D46-533E-8220-3D96-7299A91BABD9}"/>
+          </ac:spMkLst>
+        </pc:spChg>
+        <pc:spChg chg="add del">
+          <ac:chgData name="Patryk Wyczółkowski - The Company" userId="288d461d-eaab-4b00-b800-aa4e5a28dfe6" providerId="ADAL" clId="{023E43D6-DC3E-4706-BB42-F0DBAC8333BE}" dt="2026-04-04T18:14:55.550" v="254" actId="478"/>
+          <ac:spMkLst>
+            <pc:docMk/>
+            <pc:sldMk cId="2717112115" sldId="306"/>
+            <ac:spMk id="100" creationId="{E86F910F-7052-20D5-3274-A8D86AB046D8}"/>
           </ac:spMkLst>
         </pc:spChg>
       </pc:sldChg>
@@ -12195,7 +12242,7 @@
         </p:nvSpPr>
         <p:spPr>
           <a:xfrm>
-            <a:off x="4762154" y="431636"/>
+            <a:off x="4372109" y="431636"/>
             <a:ext cx="4291586" cy="571247"/>
           </a:xfrm>
           <a:prstGeom prst="rect">

--- a/Badge CC.pptx
+++ b/Badge CC.pptx
@@ -265,18 +265,10 @@
       <p15:sldGuideLst xmlns:p15="http://schemas.microsoft.com/office/powerpoint/2012/main"/>
     </p:ext>
     <p:ext uri="GoogleSlidesCustomDataVersion2">
-      <go:slidesCustomData xmlns="" xmlns:mc="http://schemas.openxmlformats.org/markup-compatibility/2006" xmlns:mv="urn:schemas-microsoft-com:mac:vml" xmlns:c="http://schemas.openxmlformats.org/drawingml/2006/chart" xmlns:dgm="http://schemas.openxmlformats.org/drawingml/2006/diagram" xmlns:o="urn:schemas-microsoft-com:office:office" xmlns:v="urn:schemas-microsoft-com:vml" xmlns:pvml="urn:schemas-microsoft-com:office:powerpoint" xmlns:com="http://schemas.openxmlformats.org/drawingml/2006/compatibility" xmlns:p14="http://schemas.microsoft.com/office/powerpoint/2010/main" xmlns:p15="http://schemas.microsoft.com/office/powerpoint/2012/main" xmlns:ahyp="http://schemas.microsoft.com/office/drawing/2018/hyperlinkcolor" xmlns:go="http://customooxmlschemas.google.com/" r:id="rId63" roundtripDataSignature="AMtx7miUS1/sxxL4JgbZEnfhDFKesaJ+9Q=="/>
+      <go:slidesCustomData xmlns:go="http://customooxmlschemas.google.com/" xmlns:ahyp="http://schemas.microsoft.com/office/drawing/2018/hyperlinkcolor" xmlns:p15="http://schemas.microsoft.com/office/powerpoint/2012/main" xmlns:p14="http://schemas.microsoft.com/office/powerpoint/2010/main" xmlns:com="http://schemas.openxmlformats.org/drawingml/2006/compatibility" xmlns:pvml="urn:schemas-microsoft-com:office:powerpoint" xmlns:v="urn:schemas-microsoft-com:vml" xmlns:o="urn:schemas-microsoft-com:office:office" xmlns:dgm="http://schemas.openxmlformats.org/drawingml/2006/diagram" xmlns:c="http://schemas.openxmlformats.org/drawingml/2006/chart" xmlns:mv="urn:schemas-microsoft-com:mac:vml" xmlns:mc="http://schemas.openxmlformats.org/markup-compatibility/2006" xmlns="" r:id="rId63" roundtripDataSignature="AMtx7miUS1/sxxL4JgbZEnfhDFKesaJ+9Q=="/>
     </p:ext>
   </p:extLst>
 </p:presentation>
-</file>
-
-<file path=ppt/revisionInfo.xml><?xml version="1.0" encoding="utf-8"?>
-<p1510:revInfo xmlns:a="http://schemas.openxmlformats.org/drawingml/2006/main" xmlns:r="http://schemas.openxmlformats.org/officeDocument/2006/relationships" xmlns:p1510="http://schemas.microsoft.com/office/powerpoint/2015/10/main">
-  <p1510:revLst>
-    <p1510:client id="{03114A9C-0E27-40E6-B74A-4BA4CDEE3DDD}" v="5" dt="2026-04-04T14:17:49.441"/>
-  </p1510:revLst>
-</p1510:revInfo>
 </file>
 
 <file path=ppt/changesInfos/changesInfo1.xml><?xml version="1.0" encoding="utf-8"?>
@@ -284,12 +276,12 @@
   <pc:docChgLst>
     <pc:chgData name="Patryk Wyczółkowski - The Company" userId="288d461d-eaab-4b00-b800-aa4e5a28dfe6" providerId="ADAL" clId="{023E43D6-DC3E-4706-BB42-F0DBAC8333BE}"/>
     <pc:docChg chg="undo custSel addSld delSld modSld sldOrd addSection modSection">
-      <pc:chgData name="Patryk Wyczółkowski - The Company" userId="288d461d-eaab-4b00-b800-aa4e5a28dfe6" providerId="ADAL" clId="{023E43D6-DC3E-4706-BB42-F0DBAC8333BE}" dt="2026-04-04T18:15:00.189" v="257" actId="1076"/>
+      <pc:chgData name="Patryk Wyczółkowski - The Company" userId="288d461d-eaab-4b00-b800-aa4e5a28dfe6" providerId="ADAL" clId="{023E43D6-DC3E-4706-BB42-F0DBAC8333BE}" dt="2026-04-21T08:50:35.248" v="258" actId="2711"/>
       <pc:docMkLst>
         <pc:docMk/>
       </pc:docMkLst>
       <pc:sldChg chg="addSp modSp mod modNotesTx">
-        <pc:chgData name="Patryk Wyczółkowski - The Company" userId="288d461d-eaab-4b00-b800-aa4e5a28dfe6" providerId="ADAL" clId="{023E43D6-DC3E-4706-BB42-F0DBAC8333BE}" dt="2026-04-04T17:43:16.301" v="236" actId="20577"/>
+        <pc:chgData name="Patryk Wyczółkowski - The Company" userId="288d461d-eaab-4b00-b800-aa4e5a28dfe6" providerId="ADAL" clId="{023E43D6-DC3E-4706-BB42-F0DBAC8333BE}" dt="2026-04-21T08:50:35.248" v="258" actId="2711"/>
         <pc:sldMkLst>
           <pc:docMk/>
           <pc:sldMk cId="1622968975" sldId="295"/>
@@ -327,7 +319,7 @@
           </ac:spMkLst>
         </pc:spChg>
         <pc:spChg chg="mod">
-          <ac:chgData name="Patryk Wyczółkowski - The Company" userId="288d461d-eaab-4b00-b800-aa4e5a28dfe6" providerId="ADAL" clId="{023E43D6-DC3E-4706-BB42-F0DBAC8333BE}" dt="2026-04-04T17:41:57.308" v="210" actId="20577"/>
+          <ac:chgData name="Patryk Wyczółkowski - The Company" userId="288d461d-eaab-4b00-b800-aa4e5a28dfe6" providerId="ADAL" clId="{023E43D6-DC3E-4706-BB42-F0DBAC8333BE}" dt="2026-04-21T08:50:35.248" v="258" actId="2711"/>
           <ac:spMkLst>
             <pc:docMk/>
             <pc:sldMk cId="1622968975" sldId="295"/>
@@ -382,81 +374,6 @@
           </ac:picMkLst>
         </pc:picChg>
       </pc:sldChg>
-      <pc:sldChg chg="new del">
-        <pc:chgData name="Patryk Wyczółkowski - The Company" userId="288d461d-eaab-4b00-b800-aa4e5a28dfe6" providerId="ADAL" clId="{023E43D6-DC3E-4706-BB42-F0DBAC8333BE}" dt="2026-04-04T14:11:00.809" v="104" actId="47"/>
-        <pc:sldMkLst>
-          <pc:docMk/>
-          <pc:sldMk cId="991759561" sldId="303"/>
-        </pc:sldMkLst>
-      </pc:sldChg>
-      <pc:sldChg chg="add del">
-        <pc:chgData name="Patryk Wyczółkowski - The Company" userId="288d461d-eaab-4b00-b800-aa4e5a28dfe6" providerId="ADAL" clId="{023E43D6-DC3E-4706-BB42-F0DBAC8333BE}" dt="2026-04-04T14:14:04.227" v="115" actId="47"/>
-        <pc:sldMkLst>
-          <pc:docMk/>
-          <pc:sldMk cId="1760921419" sldId="303"/>
-        </pc:sldMkLst>
-      </pc:sldChg>
-      <pc:sldChg chg="addSp delSp modSp add del mod modNotesTx">
-        <pc:chgData name="Patryk Wyczółkowski - The Company" userId="288d461d-eaab-4b00-b800-aa4e5a28dfe6" providerId="ADAL" clId="{023E43D6-DC3E-4706-BB42-F0DBAC8333BE}" dt="2026-04-04T17:32:09.500" v="198" actId="47"/>
-        <pc:sldMkLst>
-          <pc:docMk/>
-          <pc:sldMk cId="3531637373" sldId="303"/>
-        </pc:sldMkLst>
-        <pc:spChg chg="add mod">
-          <ac:chgData name="Patryk Wyczółkowski - The Company" userId="288d461d-eaab-4b00-b800-aa4e5a28dfe6" providerId="ADAL" clId="{023E43D6-DC3E-4706-BB42-F0DBAC8333BE}" dt="2026-04-04T14:20:55.976" v="160" actId="404"/>
-          <ac:spMkLst>
-            <pc:docMk/>
-            <pc:sldMk cId="3531637373" sldId="303"/>
-            <ac:spMk id="2" creationId="{8E756070-19EC-B969-24C6-0894096B3578}"/>
-          </ac:spMkLst>
-        </pc:spChg>
-        <pc:spChg chg="mod">
-          <ac:chgData name="Patryk Wyczółkowski - The Company" userId="288d461d-eaab-4b00-b800-aa4e5a28dfe6" providerId="ADAL" clId="{023E43D6-DC3E-4706-BB42-F0DBAC8333BE}" dt="2026-04-04T14:20:44.525" v="137" actId="1076"/>
-          <ac:spMkLst>
-            <pc:docMk/>
-            <pc:sldMk cId="3531637373" sldId="303"/>
-            <ac:spMk id="7" creationId="{49C6FFDC-9854-AAEE-EDC7-D1FEB2DC6A54}"/>
-          </ac:spMkLst>
-        </pc:spChg>
-        <pc:spChg chg="mod">
-          <ac:chgData name="Patryk Wyczółkowski - The Company" userId="288d461d-eaab-4b00-b800-aa4e5a28dfe6" providerId="ADAL" clId="{023E43D6-DC3E-4706-BB42-F0DBAC8333BE}" dt="2026-04-04T14:20:44.525" v="137" actId="1076"/>
-          <ac:spMkLst>
-            <pc:docMk/>
-            <pc:sldMk cId="3531637373" sldId="303"/>
-            <ac:spMk id="8" creationId="{C0BC620B-493C-713D-2F3E-88A03C7B8A9D}"/>
-          </ac:spMkLst>
-        </pc:spChg>
-        <pc:spChg chg="del">
-          <ac:chgData name="Patryk Wyczółkowski - The Company" userId="288d461d-eaab-4b00-b800-aa4e5a28dfe6" providerId="ADAL" clId="{023E43D6-DC3E-4706-BB42-F0DBAC8333BE}" dt="2026-04-04T14:20:47.677" v="138" actId="478"/>
-          <ac:spMkLst>
-            <pc:docMk/>
-            <pc:sldMk cId="3531637373" sldId="303"/>
-            <ac:spMk id="9" creationId="{2F7DD51B-0CA2-0228-330C-1B5D977FB87C}"/>
-          </ac:spMkLst>
-        </pc:spChg>
-      </pc:sldChg>
-      <pc:sldChg chg="new del">
-        <pc:chgData name="Patryk Wyczółkowski - The Company" userId="288d461d-eaab-4b00-b800-aa4e5a28dfe6" providerId="ADAL" clId="{023E43D6-DC3E-4706-BB42-F0DBAC8333BE}" dt="2026-04-04T14:11:01.888" v="105" actId="47"/>
-        <pc:sldMkLst>
-          <pc:docMk/>
-          <pc:sldMk cId="1180131338" sldId="304"/>
-        </pc:sldMkLst>
-      </pc:sldChg>
-      <pc:sldChg chg="modSp add del mod modNotesTx">
-        <pc:chgData name="Patryk Wyczółkowski - The Company" userId="288d461d-eaab-4b00-b800-aa4e5a28dfe6" providerId="ADAL" clId="{023E43D6-DC3E-4706-BB42-F0DBAC8333BE}" dt="2026-04-04T17:32:12.531" v="199" actId="47"/>
-        <pc:sldMkLst>
-          <pc:docMk/>
-          <pc:sldMk cId="4032356528" sldId="304"/>
-        </pc:sldMkLst>
-        <pc:spChg chg="mod">
-          <ac:chgData name="Patryk Wyczółkowski - The Company" userId="288d461d-eaab-4b00-b800-aa4e5a28dfe6" providerId="ADAL" clId="{023E43D6-DC3E-4706-BB42-F0DBAC8333BE}" dt="2026-04-04T14:21:04.693" v="171" actId="20577"/>
-          <ac:spMkLst>
-            <pc:docMk/>
-            <pc:sldMk cId="4032356528" sldId="304"/>
-            <ac:spMk id="2" creationId="{8AD80368-5CA7-F821-1A50-D7E7F48E333C}"/>
-          </ac:spMkLst>
-        </pc:spChg>
-      </pc:sldChg>
       <pc:sldChg chg="modSp add mod ord modNotesTx">
         <pc:chgData name="Patryk Wyczółkowski - The Company" userId="288d461d-eaab-4b00-b800-aa4e5a28dfe6" providerId="ADAL" clId="{023E43D6-DC3E-4706-BB42-F0DBAC8333BE}" dt="2026-04-04T17:43:20.167" v="238" actId="20577"/>
         <pc:sldMkLst>
@@ -493,45 +410,6 @@
             <pc:docMk/>
             <pc:sldMk cId="1316184106" sldId="305"/>
             <ac:spMk id="100" creationId="{1A391E51-F2E1-B61B-8167-D5C52DA531C2}"/>
-          </ac:spMkLst>
-        </pc:spChg>
-      </pc:sldChg>
-      <pc:sldChg chg="addSp delSp add del mod">
-        <pc:chgData name="Patryk Wyczółkowski - The Company" userId="288d461d-eaab-4b00-b800-aa4e5a28dfe6" providerId="ADAL" clId="{023E43D6-DC3E-4706-BB42-F0DBAC8333BE}" dt="2026-04-04T18:14:56.042" v="256" actId="2890"/>
-        <pc:sldMkLst>
-          <pc:docMk/>
-          <pc:sldMk cId="2717112115" sldId="306"/>
-        </pc:sldMkLst>
-        <pc:spChg chg="add del">
-          <ac:chgData name="Patryk Wyczółkowski - The Company" userId="288d461d-eaab-4b00-b800-aa4e5a28dfe6" providerId="ADAL" clId="{023E43D6-DC3E-4706-BB42-F0DBAC8333BE}" dt="2026-04-04T18:14:54.996" v="252" actId="478"/>
-          <ac:spMkLst>
-            <pc:docMk/>
-            <pc:sldMk cId="2717112115" sldId="306"/>
-            <ac:spMk id="2" creationId="{25D743FC-2651-5272-65D8-338C3B8FD26C}"/>
-          </ac:spMkLst>
-        </pc:spChg>
-        <pc:spChg chg="add del">
-          <ac:chgData name="Patryk Wyczółkowski - The Company" userId="288d461d-eaab-4b00-b800-aa4e5a28dfe6" providerId="ADAL" clId="{023E43D6-DC3E-4706-BB42-F0DBAC8333BE}" dt="2026-04-04T18:14:55.741" v="255" actId="478"/>
-          <ac:spMkLst>
-            <pc:docMk/>
-            <pc:sldMk cId="2717112115" sldId="306"/>
-            <ac:spMk id="98" creationId="{2E2E9F6B-DE18-9230-0746-497C7A4D6A54}"/>
-          </ac:spMkLst>
-        </pc:spChg>
-        <pc:spChg chg="add del">
-          <ac:chgData name="Patryk Wyczółkowski - The Company" userId="288d461d-eaab-4b00-b800-aa4e5a28dfe6" providerId="ADAL" clId="{023E43D6-DC3E-4706-BB42-F0DBAC8333BE}" dt="2026-04-04T18:14:55.178" v="253" actId="478"/>
-          <ac:spMkLst>
-            <pc:docMk/>
-            <pc:sldMk cId="2717112115" sldId="306"/>
-            <ac:spMk id="99" creationId="{FF874D46-533E-8220-3D96-7299A91BABD9}"/>
-          </ac:spMkLst>
-        </pc:spChg>
-        <pc:spChg chg="add del">
-          <ac:chgData name="Patryk Wyczółkowski - The Company" userId="288d461d-eaab-4b00-b800-aa4e5a28dfe6" providerId="ADAL" clId="{023E43D6-DC3E-4706-BB42-F0DBAC8333BE}" dt="2026-04-04T18:14:55.550" v="254" actId="478"/>
-          <ac:spMkLst>
-            <pc:docMk/>
-            <pc:sldMk cId="2717112115" sldId="306"/>
-            <ac:spMk id="100" creationId="{E86F910F-7052-20D5-3274-A8D86AB046D8}"/>
           </ac:spMkLst>
         </pc:spChg>
       </pc:sldChg>
@@ -11938,12 +11816,14 @@
                 <a:solidFill>
                   <a:srgbClr val="1F1F1F"/>
                 </a:solidFill>
-                <a:latin typeface="+mj-lt"/>
+                <a:latin typeface="Arial" panose="020B0604020202020204" pitchFamily="34" charset="0"/>
+                <a:cs typeface="Arial" panose="020B0604020202020204" pitchFamily="34" charset="0"/>
               </a:rPr>
               <a:t>{{Firma}}</a:t>
             </a:r>
             <a:endParaRPr lang="pl-PL" dirty="0">
-              <a:latin typeface="+mj-lt"/>
+              <a:latin typeface="Arial" panose="020B0604020202020204" pitchFamily="34" charset="0"/>
+              <a:cs typeface="Arial" panose="020B0604020202020204" pitchFamily="34" charset="0"/>
             </a:endParaRPr>
           </a:p>
         </p:txBody>

--- a/Badge CC.pptx
+++ b/Badge CC.pptx
@@ -265,7 +265,7 @@
       <p15:sldGuideLst xmlns:p15="http://schemas.microsoft.com/office/powerpoint/2012/main"/>
     </p:ext>
     <p:ext uri="GoogleSlidesCustomDataVersion2">
-      <go:slidesCustomData xmlns:go="http://customooxmlschemas.google.com/" xmlns:ahyp="http://schemas.microsoft.com/office/drawing/2018/hyperlinkcolor" xmlns:p15="http://schemas.microsoft.com/office/powerpoint/2012/main" xmlns:p14="http://schemas.microsoft.com/office/powerpoint/2010/main" xmlns:com="http://schemas.openxmlformats.org/drawingml/2006/compatibility" xmlns:pvml="urn:schemas-microsoft-com:office:powerpoint" xmlns:v="urn:schemas-microsoft-com:vml" xmlns:o="urn:schemas-microsoft-com:office:office" xmlns:dgm="http://schemas.openxmlformats.org/drawingml/2006/diagram" xmlns:c="http://schemas.openxmlformats.org/drawingml/2006/chart" xmlns:mv="urn:schemas-microsoft-com:mac:vml" xmlns:mc="http://schemas.openxmlformats.org/markup-compatibility/2006" xmlns="" r:id="rId63" roundtripDataSignature="AMtx7miUS1/sxxL4JgbZEnfhDFKesaJ+9Q=="/>
+      <go:slidesCustomData xmlns="" xmlns:mc="http://schemas.openxmlformats.org/markup-compatibility/2006" xmlns:mv="urn:schemas-microsoft-com:mac:vml" xmlns:c="http://schemas.openxmlformats.org/drawingml/2006/chart" xmlns:dgm="http://schemas.openxmlformats.org/drawingml/2006/diagram" xmlns:o="urn:schemas-microsoft-com:office:office" xmlns:v="urn:schemas-microsoft-com:vml" xmlns:pvml="urn:schemas-microsoft-com:office:powerpoint" xmlns:com="http://schemas.openxmlformats.org/drawingml/2006/compatibility" xmlns:p14="http://schemas.microsoft.com/office/powerpoint/2010/main" xmlns:p15="http://schemas.microsoft.com/office/powerpoint/2012/main" xmlns:ahyp="http://schemas.microsoft.com/office/drawing/2018/hyperlinkcolor" xmlns:go="http://customooxmlschemas.google.com/" r:id="rId63" roundtripDataSignature="AMtx7miUS1/sxxL4JgbZEnfhDFKesaJ+9Q=="/>
     </p:ext>
   </p:extLst>
 </p:presentation>
@@ -276,12 +276,12 @@
   <pc:docChgLst>
     <pc:chgData name="Patryk Wyczółkowski - The Company" userId="288d461d-eaab-4b00-b800-aa4e5a28dfe6" providerId="ADAL" clId="{023E43D6-DC3E-4706-BB42-F0DBAC8333BE}"/>
     <pc:docChg chg="undo custSel addSld delSld modSld sldOrd addSection modSection">
-      <pc:chgData name="Patryk Wyczółkowski - The Company" userId="288d461d-eaab-4b00-b800-aa4e5a28dfe6" providerId="ADAL" clId="{023E43D6-DC3E-4706-BB42-F0DBAC8333BE}" dt="2026-04-21T08:50:35.248" v="258" actId="2711"/>
+      <pc:chgData name="Patryk Wyczółkowski - The Company" userId="288d461d-eaab-4b00-b800-aa4e5a28dfe6" providerId="ADAL" clId="{023E43D6-DC3E-4706-BB42-F0DBAC8333BE}" dt="2026-04-21T08:58:32.931" v="272" actId="113"/>
       <pc:docMkLst>
         <pc:docMk/>
       </pc:docMkLst>
       <pc:sldChg chg="addSp modSp mod modNotesTx">
-        <pc:chgData name="Patryk Wyczółkowski - The Company" userId="288d461d-eaab-4b00-b800-aa4e5a28dfe6" providerId="ADAL" clId="{023E43D6-DC3E-4706-BB42-F0DBAC8333BE}" dt="2026-04-21T08:50:35.248" v="258" actId="2711"/>
+        <pc:chgData name="Patryk Wyczółkowski - The Company" userId="288d461d-eaab-4b00-b800-aa4e5a28dfe6" providerId="ADAL" clId="{023E43D6-DC3E-4706-BB42-F0DBAC8333BE}" dt="2026-04-21T08:58:24.198" v="267" actId="113"/>
         <pc:sldMkLst>
           <pc:docMk/>
           <pc:sldMk cId="1622968975" sldId="295"/>
@@ -311,7 +311,7 @@
           </ac:spMkLst>
         </pc:spChg>
         <pc:spChg chg="mod">
-          <ac:chgData name="Patryk Wyczółkowski - The Company" userId="288d461d-eaab-4b00-b800-aa4e5a28dfe6" providerId="ADAL" clId="{023E43D6-DC3E-4706-BB42-F0DBAC8333BE}" dt="2026-04-04T17:41:59.353" v="212" actId="20577"/>
+          <ac:chgData name="Patryk Wyczółkowski - The Company" userId="288d461d-eaab-4b00-b800-aa4e5a28dfe6" providerId="ADAL" clId="{023E43D6-DC3E-4706-BB42-F0DBAC8333BE}" dt="2026-04-21T08:58:24.198" v="267" actId="113"/>
           <ac:spMkLst>
             <pc:docMk/>
             <pc:sldMk cId="1622968975" sldId="295"/>
@@ -319,7 +319,7 @@
           </ac:spMkLst>
         </pc:spChg>
         <pc:spChg chg="mod">
-          <ac:chgData name="Patryk Wyczółkowski - The Company" userId="288d461d-eaab-4b00-b800-aa4e5a28dfe6" providerId="ADAL" clId="{023E43D6-DC3E-4706-BB42-F0DBAC8333BE}" dt="2026-04-21T08:50:35.248" v="258" actId="2711"/>
+          <ac:chgData name="Patryk Wyczółkowski - The Company" userId="288d461d-eaab-4b00-b800-aa4e5a28dfe6" providerId="ADAL" clId="{023E43D6-DC3E-4706-BB42-F0DBAC8333BE}" dt="2026-04-21T08:58:22.832" v="266" actId="113"/>
           <ac:spMkLst>
             <pc:docMk/>
             <pc:sldMk cId="1622968975" sldId="295"/>
@@ -328,7 +328,7 @@
         </pc:spChg>
       </pc:sldChg>
       <pc:sldChg chg="addSp delSp modSp add mod modNotesTx">
-        <pc:chgData name="Patryk Wyczółkowski - The Company" userId="288d461d-eaab-4b00-b800-aa4e5a28dfe6" providerId="ADAL" clId="{023E43D6-DC3E-4706-BB42-F0DBAC8333BE}" dt="2026-04-04T18:15:00.189" v="257" actId="1076"/>
+        <pc:chgData name="Patryk Wyczółkowski - The Company" userId="288d461d-eaab-4b00-b800-aa4e5a28dfe6" providerId="ADAL" clId="{023E43D6-DC3E-4706-BB42-F0DBAC8333BE}" dt="2026-04-21T08:58:29.866" v="270" actId="113"/>
         <pc:sldMkLst>
           <pc:docMk/>
           <pc:sldMk cId="1185325920" sldId="302"/>
@@ -342,7 +342,7 @@
           </ac:spMkLst>
         </pc:spChg>
         <pc:spChg chg="add del mod">
-          <ac:chgData name="Patryk Wyczółkowski - The Company" userId="288d461d-eaab-4b00-b800-aa4e5a28dfe6" providerId="ADAL" clId="{023E43D6-DC3E-4706-BB42-F0DBAC8333BE}" dt="2026-04-04T18:14:54.847" v="251" actId="478"/>
+          <ac:chgData name="Patryk Wyczółkowski - The Company" userId="288d461d-eaab-4b00-b800-aa4e5a28dfe6" providerId="ADAL" clId="{023E43D6-DC3E-4706-BB42-F0DBAC8333BE}" dt="2026-04-21T08:58:29.866" v="270" actId="113"/>
           <ac:spMkLst>
             <pc:docMk/>
             <pc:sldMk cId="1185325920" sldId="302"/>
@@ -350,7 +350,7 @@
           </ac:spMkLst>
         </pc:spChg>
         <pc:spChg chg="add del mod">
-          <ac:chgData name="Patryk Wyczółkowski - The Company" userId="288d461d-eaab-4b00-b800-aa4e5a28dfe6" providerId="ADAL" clId="{023E43D6-DC3E-4706-BB42-F0DBAC8333BE}" dt="2026-04-04T18:14:54.847" v="251" actId="478"/>
+          <ac:chgData name="Patryk Wyczółkowski - The Company" userId="288d461d-eaab-4b00-b800-aa4e5a28dfe6" providerId="ADAL" clId="{023E43D6-DC3E-4706-BB42-F0DBAC8333BE}" dt="2026-04-21T08:58:27.676" v="268" actId="113"/>
           <ac:spMkLst>
             <pc:docMk/>
             <pc:sldMk cId="1185325920" sldId="302"/>
@@ -375,7 +375,7 @@
         </pc:picChg>
       </pc:sldChg>
       <pc:sldChg chg="modSp add mod ord modNotesTx">
-        <pc:chgData name="Patryk Wyczółkowski - The Company" userId="288d461d-eaab-4b00-b800-aa4e5a28dfe6" providerId="ADAL" clId="{023E43D6-DC3E-4706-BB42-F0DBAC8333BE}" dt="2026-04-04T17:43:20.167" v="238" actId="20577"/>
+        <pc:chgData name="Patryk Wyczółkowski - The Company" userId="288d461d-eaab-4b00-b800-aa4e5a28dfe6" providerId="ADAL" clId="{023E43D6-DC3E-4706-BB42-F0DBAC8333BE}" dt="2026-04-21T08:58:32.931" v="272" actId="113"/>
         <pc:sldMkLst>
           <pc:docMk/>
           <pc:sldMk cId="1316184106" sldId="305"/>
@@ -397,7 +397,7 @@
           </ac:spMkLst>
         </pc:spChg>
         <pc:spChg chg="mod">
-          <ac:chgData name="Patryk Wyczółkowski - The Company" userId="288d461d-eaab-4b00-b800-aa4e5a28dfe6" providerId="ADAL" clId="{023E43D6-DC3E-4706-BB42-F0DBAC8333BE}" dt="2026-04-04T17:42:14.669" v="222" actId="20577"/>
+          <ac:chgData name="Patryk Wyczółkowski - The Company" userId="288d461d-eaab-4b00-b800-aa4e5a28dfe6" providerId="ADAL" clId="{023E43D6-DC3E-4706-BB42-F0DBAC8333BE}" dt="2026-04-21T08:58:32.931" v="272" actId="113"/>
           <ac:spMkLst>
             <pc:docMk/>
             <pc:sldMk cId="1316184106" sldId="305"/>
@@ -405,7 +405,7 @@
           </ac:spMkLst>
         </pc:spChg>
         <pc:spChg chg="mod">
-          <ac:chgData name="Patryk Wyczółkowski - The Company" userId="288d461d-eaab-4b00-b800-aa4e5a28dfe6" providerId="ADAL" clId="{023E43D6-DC3E-4706-BB42-F0DBAC8333BE}" dt="2026-04-04T17:42:12.070" v="220" actId="20577"/>
+          <ac:chgData name="Patryk Wyczółkowski - The Company" userId="288d461d-eaab-4b00-b800-aa4e5a28dfe6" providerId="ADAL" clId="{023E43D6-DC3E-4706-BB42-F0DBAC8333BE}" dt="2026-04-21T08:58:31.799" v="271" actId="113"/>
           <ac:spMkLst>
             <pc:docMk/>
             <pc:sldMk cId="1316184106" sldId="305"/>
@@ -11760,14 +11760,18 @@
               <a:buNone/>
             </a:pPr>
             <a:r>
-              <a:rPr lang="pl-PL" sz="3000" dirty="0">
+              <a:rPr lang="pl-PL" sz="3000" b="1" dirty="0">
                 <a:solidFill>
-                  <a:schemeClr val="dk1"/>
+                  <a:schemeClr val="tx1"/>
                 </a:solidFill>
               </a:rPr>
               <a:t>{{Branża}}</a:t>
             </a:r>
-            <a:endParaRPr lang="pl-PL" sz="800" dirty="0"/>
+            <a:endParaRPr lang="pl-PL" sz="800" b="1" dirty="0">
+              <a:solidFill>
+                <a:schemeClr val="tx1"/>
+              </a:solidFill>
+            </a:endParaRPr>
           </a:p>
         </p:txBody>
       </p:sp>
@@ -11812,16 +11816,19 @@
               <a:buNone/>
             </a:pPr>
             <a:r>
-              <a:rPr lang="pl-PL" sz="4400" dirty="0">
+              <a:rPr lang="pl-PL" sz="4400" b="1" dirty="0">
                 <a:solidFill>
-                  <a:srgbClr val="1F1F1F"/>
+                  <a:schemeClr val="tx1"/>
                 </a:solidFill>
                 <a:latin typeface="Arial" panose="020B0604020202020204" pitchFamily="34" charset="0"/>
                 <a:cs typeface="Arial" panose="020B0604020202020204" pitchFamily="34" charset="0"/>
               </a:rPr>
               <a:t>{{Firma}}</a:t>
             </a:r>
-            <a:endParaRPr lang="pl-PL" dirty="0">
+            <a:endParaRPr lang="pl-PL" b="1" dirty="0">
+              <a:solidFill>
+                <a:schemeClr val="tx1"/>
+              </a:solidFill>
               <a:latin typeface="Arial" panose="020B0604020202020204" pitchFamily="34" charset="0"/>
               <a:cs typeface="Arial" panose="020B0604020202020204" pitchFamily="34" charset="0"/>
             </a:endParaRPr>
@@ -12098,7 +12105,7 @@
               <a:defRPr/>
             </a:pPr>
             <a:r>
-              <a:rPr lang="pl-PL" sz="4400" dirty="0">
+              <a:rPr lang="pl-PL" sz="4400" b="1" dirty="0">
                 <a:solidFill>
                   <a:sysClr val="windowText" lastClr="000000"/>
                 </a:solidFill>
@@ -12407,14 +12414,14 @@
               <a:buNone/>
             </a:pPr>
             <a:r>
-              <a:rPr lang="pl-PL" sz="3000" dirty="0">
+              <a:rPr lang="pl-PL" sz="3000" b="1" dirty="0">
                 <a:solidFill>
                   <a:schemeClr val="dk1"/>
                 </a:solidFill>
               </a:rPr>
               <a:t>{{Branża}}</a:t>
             </a:r>
-            <a:endParaRPr lang="pl-PL" sz="800" dirty="0"/>
+            <a:endParaRPr lang="pl-PL" sz="800" b="1" dirty="0"/>
           </a:p>
         </p:txBody>
       </p:sp>
@@ -12459,7 +12466,7 @@
               <a:buNone/>
             </a:pPr>
             <a:r>
-              <a:rPr lang="pl-PL" sz="4400" dirty="0">
+              <a:rPr lang="pl-PL" sz="4400" b="1" dirty="0">
                 <a:solidFill>
                   <a:srgbClr val="1F1F1F"/>
                 </a:solidFill>
@@ -12467,7 +12474,7 @@
               </a:rPr>
               <a:t>{{Firma}}</a:t>
             </a:r>
-            <a:endParaRPr lang="pl-PL" dirty="0">
+            <a:endParaRPr lang="pl-PL" b="1" dirty="0">
               <a:latin typeface="+mj-lt"/>
             </a:endParaRPr>
           </a:p>

--- a/Badge CC.pptx
+++ b/Badge CC.pptx
@@ -16,8 +16,12 @@
   <p:notesSz cx="1493838" cy="2609850"/>
   <p:embeddedFontLst>
     <p:embeddedFont>
+      <p:font typeface="Aptos Black" panose="020B0004020202020204" pitchFamily="34" charset="0"/>
+      <p:bold r:id="rId6"/>
+    </p:embeddedFont>
+    <p:embeddedFont>
       <p:font typeface="Arial Black" panose="020B0A04020102020204" pitchFamily="34" charset="0"/>
-      <p:bold r:id="rId6"/>
+      <p:bold r:id="rId7"/>
     </p:embeddedFont>
   </p:embeddedFontLst>
   <p:defaultTextStyle>
@@ -265,10 +269,18 @@
       <p15:sldGuideLst xmlns:p15="http://schemas.microsoft.com/office/powerpoint/2012/main"/>
     </p:ext>
     <p:ext uri="GoogleSlidesCustomDataVersion2">
-      <go:slidesCustomData xmlns="" xmlns:mc="http://schemas.openxmlformats.org/markup-compatibility/2006" xmlns:mv="urn:schemas-microsoft-com:mac:vml" xmlns:c="http://schemas.openxmlformats.org/drawingml/2006/chart" xmlns:dgm="http://schemas.openxmlformats.org/drawingml/2006/diagram" xmlns:o="urn:schemas-microsoft-com:office:office" xmlns:v="urn:schemas-microsoft-com:vml" xmlns:pvml="urn:schemas-microsoft-com:office:powerpoint" xmlns:com="http://schemas.openxmlformats.org/drawingml/2006/compatibility" xmlns:p14="http://schemas.microsoft.com/office/powerpoint/2010/main" xmlns:p15="http://schemas.microsoft.com/office/powerpoint/2012/main" xmlns:ahyp="http://schemas.microsoft.com/office/drawing/2018/hyperlinkcolor" xmlns:go="http://customooxmlschemas.google.com/" r:id="rId63" roundtripDataSignature="AMtx7miUS1/sxxL4JgbZEnfhDFKesaJ+9Q=="/>
+      <go:slidesCustomData xmlns:go="http://customooxmlschemas.google.com/" xmlns:ahyp="http://schemas.microsoft.com/office/drawing/2018/hyperlinkcolor" xmlns:p15="http://schemas.microsoft.com/office/powerpoint/2012/main" xmlns:p14="http://schemas.microsoft.com/office/powerpoint/2010/main" xmlns:com="http://schemas.openxmlformats.org/drawingml/2006/compatibility" xmlns:pvml="urn:schemas-microsoft-com:office:powerpoint" xmlns:v="urn:schemas-microsoft-com:vml" xmlns:o="urn:schemas-microsoft-com:office:office" xmlns:dgm="http://schemas.openxmlformats.org/drawingml/2006/diagram" xmlns:c="http://schemas.openxmlformats.org/drawingml/2006/chart" xmlns:mv="urn:schemas-microsoft-com:mac:vml" xmlns:mc="http://schemas.openxmlformats.org/markup-compatibility/2006" xmlns="" r:id="rId63" roundtripDataSignature="AMtx7miUS1/sxxL4JgbZEnfhDFKesaJ+9Q=="/>
     </p:ext>
   </p:extLst>
 </p:presentation>
+</file>
+
+<file path=ppt/revisionInfo.xml><?xml version="1.0" encoding="utf-8"?>
+<p1510:revInfo xmlns:a="http://schemas.openxmlformats.org/drawingml/2006/main" xmlns:r="http://schemas.openxmlformats.org/officeDocument/2006/relationships" xmlns:p1510="http://schemas.microsoft.com/office/powerpoint/2015/10/main">
+  <p1510:revLst>
+    <p1510:client id="{9EFC575E-38DB-48DC-BCFB-263BE95900F3}" v="2" dt="2026-04-21T09:07:04.166"/>
+  </p1510:revLst>
+</p1510:revInfo>
 </file>
 
 <file path=ppt/changesInfos/changesInfo1.xml><?xml version="1.0" encoding="utf-8"?>
@@ -276,12 +288,12 @@
   <pc:docChgLst>
     <pc:chgData name="Patryk Wyczółkowski - The Company" userId="288d461d-eaab-4b00-b800-aa4e5a28dfe6" providerId="ADAL" clId="{023E43D6-DC3E-4706-BB42-F0DBAC8333BE}"/>
     <pc:docChg chg="undo custSel addSld delSld modSld sldOrd addSection modSection">
-      <pc:chgData name="Patryk Wyczółkowski - The Company" userId="288d461d-eaab-4b00-b800-aa4e5a28dfe6" providerId="ADAL" clId="{023E43D6-DC3E-4706-BB42-F0DBAC8333BE}" dt="2026-04-21T08:58:32.931" v="272" actId="113"/>
+      <pc:chgData name="Patryk Wyczółkowski - The Company" userId="288d461d-eaab-4b00-b800-aa4e5a28dfe6" providerId="ADAL" clId="{023E43D6-DC3E-4706-BB42-F0DBAC8333BE}" dt="2026-04-21T09:07:52.801" v="336" actId="1076"/>
       <pc:docMkLst>
         <pc:docMk/>
       </pc:docMkLst>
-      <pc:sldChg chg="addSp modSp mod modNotesTx">
-        <pc:chgData name="Patryk Wyczółkowski - The Company" userId="288d461d-eaab-4b00-b800-aa4e5a28dfe6" providerId="ADAL" clId="{023E43D6-DC3E-4706-BB42-F0DBAC8333BE}" dt="2026-04-21T08:58:24.198" v="267" actId="113"/>
+      <pc:sldChg chg="addSp delSp modSp mod modNotesTx">
+        <pc:chgData name="Patryk Wyczółkowski - The Company" userId="288d461d-eaab-4b00-b800-aa4e5a28dfe6" providerId="ADAL" clId="{023E43D6-DC3E-4706-BB42-F0DBAC8333BE}" dt="2026-04-21T09:07:04.166" v="330"/>
         <pc:sldMkLst>
           <pc:docMk/>
           <pc:sldMk cId="1622968975" sldId="295"/>
@@ -294,6 +306,30 @@
             <ac:spMk id="2" creationId="{F526C0F5-3FAC-ED2E-4EBA-CE55BAD1943E}"/>
           </ac:spMkLst>
         </pc:spChg>
+        <pc:spChg chg="add mod">
+          <ac:chgData name="Patryk Wyczółkowski - The Company" userId="288d461d-eaab-4b00-b800-aa4e5a28dfe6" providerId="ADAL" clId="{023E43D6-DC3E-4706-BB42-F0DBAC8333BE}" dt="2026-04-21T09:07:04.166" v="330"/>
+          <ac:spMkLst>
+            <pc:docMk/>
+            <pc:sldMk cId="1622968975" sldId="295"/>
+            <ac:spMk id="3" creationId="{861F786D-AEC2-5D7B-6491-5C05068EE6E6}"/>
+          </ac:spMkLst>
+        </pc:spChg>
+        <pc:spChg chg="add mod">
+          <ac:chgData name="Patryk Wyczółkowski - The Company" userId="288d461d-eaab-4b00-b800-aa4e5a28dfe6" providerId="ADAL" clId="{023E43D6-DC3E-4706-BB42-F0DBAC8333BE}" dt="2026-04-21T09:07:04.166" v="330"/>
+          <ac:spMkLst>
+            <pc:docMk/>
+            <pc:sldMk cId="1622968975" sldId="295"/>
+            <ac:spMk id="4" creationId="{0CAEEC03-BA3A-621E-FD23-14561FF70961}"/>
+          </ac:spMkLst>
+        </pc:spChg>
+        <pc:spChg chg="add mod">
+          <ac:chgData name="Patryk Wyczółkowski - The Company" userId="288d461d-eaab-4b00-b800-aa4e5a28dfe6" providerId="ADAL" clId="{023E43D6-DC3E-4706-BB42-F0DBAC8333BE}" dt="2026-04-21T09:07:04.166" v="330"/>
+          <ac:spMkLst>
+            <pc:docMk/>
+            <pc:sldMk cId="1622968975" sldId="295"/>
+            <ac:spMk id="5" creationId="{86D234C8-555B-8BA5-EAC3-7455D515869A}"/>
+          </ac:spMkLst>
+        </pc:spChg>
         <pc:spChg chg="mod">
           <ac:chgData name="Patryk Wyczółkowski - The Company" userId="288d461d-eaab-4b00-b800-aa4e5a28dfe6" providerId="ADAL" clId="{023E43D6-DC3E-4706-BB42-F0DBAC8333BE}" dt="2026-04-04T11:56:22.820" v="76" actId="21"/>
           <ac:spMkLst>
@@ -302,24 +338,24 @@
             <ac:spMk id="96" creationId="{D20E7F40-D509-471A-B803-94875A375664}"/>
           </ac:spMkLst>
         </pc:spChg>
-        <pc:spChg chg="mod">
-          <ac:chgData name="Patryk Wyczółkowski - The Company" userId="288d461d-eaab-4b00-b800-aa4e5a28dfe6" providerId="ADAL" clId="{023E43D6-DC3E-4706-BB42-F0DBAC8333BE}" dt="2026-04-04T17:41:54.139" v="208" actId="20577"/>
+        <pc:spChg chg="del mod">
+          <ac:chgData name="Patryk Wyczółkowski - The Company" userId="288d461d-eaab-4b00-b800-aa4e5a28dfe6" providerId="ADAL" clId="{023E43D6-DC3E-4706-BB42-F0DBAC8333BE}" dt="2026-04-21T09:04:05.956" v="285" actId="21"/>
           <ac:spMkLst>
             <pc:docMk/>
             <pc:sldMk cId="1622968975" sldId="295"/>
             <ac:spMk id="98" creationId="{52A7AF0A-3860-83E0-D799-36B8F64C1B1D}"/>
           </ac:spMkLst>
         </pc:spChg>
-        <pc:spChg chg="mod">
-          <ac:chgData name="Patryk Wyczółkowski - The Company" userId="288d461d-eaab-4b00-b800-aa4e5a28dfe6" providerId="ADAL" clId="{023E43D6-DC3E-4706-BB42-F0DBAC8333BE}" dt="2026-04-21T08:58:24.198" v="267" actId="113"/>
+        <pc:spChg chg="del mod">
+          <ac:chgData name="Patryk Wyczółkowski - The Company" userId="288d461d-eaab-4b00-b800-aa4e5a28dfe6" providerId="ADAL" clId="{023E43D6-DC3E-4706-BB42-F0DBAC8333BE}" dt="2026-04-21T09:07:03.745" v="329" actId="478"/>
           <ac:spMkLst>
             <pc:docMk/>
             <pc:sldMk cId="1622968975" sldId="295"/>
             <ac:spMk id="99" creationId="{956F426A-B8C9-7258-1BC9-7656AAD18F9A}"/>
           </ac:spMkLst>
         </pc:spChg>
-        <pc:spChg chg="mod">
-          <ac:chgData name="Patryk Wyczółkowski - The Company" userId="288d461d-eaab-4b00-b800-aa4e5a28dfe6" providerId="ADAL" clId="{023E43D6-DC3E-4706-BB42-F0DBAC8333BE}" dt="2026-04-21T08:58:22.832" v="266" actId="113"/>
+        <pc:spChg chg="del mod">
+          <ac:chgData name="Patryk Wyczółkowski - The Company" userId="288d461d-eaab-4b00-b800-aa4e5a28dfe6" providerId="ADAL" clId="{023E43D6-DC3E-4706-BB42-F0DBAC8333BE}" dt="2026-04-21T09:07:03.745" v="329" actId="478"/>
           <ac:spMkLst>
             <pc:docMk/>
             <pc:sldMk cId="1622968975" sldId="295"/>
@@ -328,13 +364,13 @@
         </pc:spChg>
       </pc:sldChg>
       <pc:sldChg chg="addSp delSp modSp add mod modNotesTx">
-        <pc:chgData name="Patryk Wyczółkowski - The Company" userId="288d461d-eaab-4b00-b800-aa4e5a28dfe6" providerId="ADAL" clId="{023E43D6-DC3E-4706-BB42-F0DBAC8333BE}" dt="2026-04-21T08:58:29.866" v="270" actId="113"/>
+        <pc:chgData name="Patryk Wyczółkowski - The Company" userId="288d461d-eaab-4b00-b800-aa4e5a28dfe6" providerId="ADAL" clId="{023E43D6-DC3E-4706-BB42-F0DBAC8333BE}" dt="2026-04-21T09:07:52.801" v="336" actId="1076"/>
         <pc:sldMkLst>
           <pc:docMk/>
           <pc:sldMk cId="1185325920" sldId="302"/>
         </pc:sldMkLst>
         <pc:spChg chg="add del mod">
-          <ac:chgData name="Patryk Wyczółkowski - The Company" userId="288d461d-eaab-4b00-b800-aa4e5a28dfe6" providerId="ADAL" clId="{023E43D6-DC3E-4706-BB42-F0DBAC8333BE}" dt="2026-04-04T18:14:54.690" v="250" actId="6549"/>
+          <ac:chgData name="Patryk Wyczółkowski - The Company" userId="288d461d-eaab-4b00-b800-aa4e5a28dfe6" providerId="ADAL" clId="{023E43D6-DC3E-4706-BB42-F0DBAC8333BE}" dt="2026-04-21T09:07:52.801" v="336" actId="1076"/>
           <ac:spMkLst>
             <pc:docMk/>
             <pc:sldMk cId="1185325920" sldId="302"/>
@@ -342,7 +378,7 @@
           </ac:spMkLst>
         </pc:spChg>
         <pc:spChg chg="add del mod">
-          <ac:chgData name="Patryk Wyczółkowski - The Company" userId="288d461d-eaab-4b00-b800-aa4e5a28dfe6" providerId="ADAL" clId="{023E43D6-DC3E-4706-BB42-F0DBAC8333BE}" dt="2026-04-21T08:58:29.866" v="270" actId="113"/>
+          <ac:chgData name="Patryk Wyczółkowski - The Company" userId="288d461d-eaab-4b00-b800-aa4e5a28dfe6" providerId="ADAL" clId="{023E43D6-DC3E-4706-BB42-F0DBAC8333BE}" dt="2026-04-21T09:07:35.106" v="334" actId="1076"/>
           <ac:spMkLst>
             <pc:docMk/>
             <pc:sldMk cId="1185325920" sldId="302"/>
@@ -350,7 +386,7 @@
           </ac:spMkLst>
         </pc:spChg>
         <pc:spChg chg="add del mod">
-          <ac:chgData name="Patryk Wyczółkowski - The Company" userId="288d461d-eaab-4b00-b800-aa4e5a28dfe6" providerId="ADAL" clId="{023E43D6-DC3E-4706-BB42-F0DBAC8333BE}" dt="2026-04-21T08:58:27.676" v="268" actId="113"/>
+          <ac:chgData name="Patryk Wyczółkowski - The Company" userId="288d461d-eaab-4b00-b800-aa4e5a28dfe6" providerId="ADAL" clId="{023E43D6-DC3E-4706-BB42-F0DBAC8333BE}" dt="2026-04-21T09:07:35.106" v="334" actId="1076"/>
           <ac:spMkLst>
             <pc:docMk/>
             <pc:sldMk cId="1185325920" sldId="302"/>
@@ -374,8 +410,8 @@
           </ac:picMkLst>
         </pc:picChg>
       </pc:sldChg>
-      <pc:sldChg chg="modSp add mod ord modNotesTx">
-        <pc:chgData name="Patryk Wyczółkowski - The Company" userId="288d461d-eaab-4b00-b800-aa4e5a28dfe6" providerId="ADAL" clId="{023E43D6-DC3E-4706-BB42-F0DBAC8333BE}" dt="2026-04-21T08:58:32.931" v="272" actId="113"/>
+      <pc:sldChg chg="addSp delSp modSp add mod ord modNotesTx">
+        <pc:chgData name="Patryk Wyczółkowski - The Company" userId="288d461d-eaab-4b00-b800-aa4e5a28dfe6" providerId="ADAL" clId="{023E43D6-DC3E-4706-BB42-F0DBAC8333BE}" dt="2026-04-21T09:06:53.567" v="328" actId="2711"/>
         <pc:sldMkLst>
           <pc:docMk/>
           <pc:sldMk cId="1316184106" sldId="305"/>
@@ -388,8 +424,16 @@
             <ac:spMk id="2" creationId="{23A0477D-21B9-A65B-8CA4-9A7B45F952A3}"/>
           </ac:spMkLst>
         </pc:spChg>
-        <pc:spChg chg="mod">
-          <ac:chgData name="Patryk Wyczółkowski - The Company" userId="288d461d-eaab-4b00-b800-aa4e5a28dfe6" providerId="ADAL" clId="{023E43D6-DC3E-4706-BB42-F0DBAC8333BE}" dt="2026-04-04T17:42:09.067" v="218" actId="20577"/>
+        <pc:spChg chg="add mod">
+          <ac:chgData name="Patryk Wyczółkowski - The Company" userId="288d461d-eaab-4b00-b800-aa4e5a28dfe6" providerId="ADAL" clId="{023E43D6-DC3E-4706-BB42-F0DBAC8333BE}" dt="2026-04-21T09:05:59.757" v="326" actId="1035"/>
+          <ac:spMkLst>
+            <pc:docMk/>
+            <pc:sldMk cId="1316184106" sldId="305"/>
+            <ac:spMk id="3" creationId="{52A7AF0A-3860-83E0-D799-36B8F64C1B1D}"/>
+          </ac:spMkLst>
+        </pc:spChg>
+        <pc:spChg chg="del mod">
+          <ac:chgData name="Patryk Wyczółkowski - The Company" userId="288d461d-eaab-4b00-b800-aa4e5a28dfe6" providerId="ADAL" clId="{023E43D6-DC3E-4706-BB42-F0DBAC8333BE}" dt="2026-04-21T09:04:08.046" v="286" actId="478"/>
           <ac:spMkLst>
             <pc:docMk/>
             <pc:sldMk cId="1316184106" sldId="305"/>
@@ -397,7 +441,7 @@
           </ac:spMkLst>
         </pc:spChg>
         <pc:spChg chg="mod">
-          <ac:chgData name="Patryk Wyczółkowski - The Company" userId="288d461d-eaab-4b00-b800-aa4e5a28dfe6" providerId="ADAL" clId="{023E43D6-DC3E-4706-BB42-F0DBAC8333BE}" dt="2026-04-21T08:58:32.931" v="272" actId="113"/>
+          <ac:chgData name="Patryk Wyczółkowski - The Company" userId="288d461d-eaab-4b00-b800-aa4e5a28dfe6" providerId="ADAL" clId="{023E43D6-DC3E-4706-BB42-F0DBAC8333BE}" dt="2026-04-21T09:06:36.606" v="327" actId="255"/>
           <ac:spMkLst>
             <pc:docMk/>
             <pc:sldMk cId="1316184106" sldId="305"/>
@@ -405,13 +449,21 @@
           </ac:spMkLst>
         </pc:spChg>
         <pc:spChg chg="mod">
-          <ac:chgData name="Patryk Wyczółkowski - The Company" userId="288d461d-eaab-4b00-b800-aa4e5a28dfe6" providerId="ADAL" clId="{023E43D6-DC3E-4706-BB42-F0DBAC8333BE}" dt="2026-04-21T08:58:31.799" v="271" actId="113"/>
+          <ac:chgData name="Patryk Wyczółkowski - The Company" userId="288d461d-eaab-4b00-b800-aa4e5a28dfe6" providerId="ADAL" clId="{023E43D6-DC3E-4706-BB42-F0DBAC8333BE}" dt="2026-04-21T09:06:53.567" v="328" actId="2711"/>
           <ac:spMkLst>
             <pc:docMk/>
             <pc:sldMk cId="1316184106" sldId="305"/>
             <ac:spMk id="100" creationId="{1A391E51-F2E1-B61B-8167-D5C52DA531C2}"/>
           </ac:spMkLst>
         </pc:spChg>
+        <pc:picChg chg="mod">
+          <ac:chgData name="Patryk Wyczółkowski - The Company" userId="288d461d-eaab-4b00-b800-aa4e5a28dfe6" providerId="ADAL" clId="{023E43D6-DC3E-4706-BB42-F0DBAC8333BE}" dt="2026-04-21T09:04:26.804" v="288" actId="14100"/>
+          <ac:picMkLst>
+            <pc:docMk/>
+            <pc:sldMk cId="1316184106" sldId="305"/>
+            <ac:picMk id="102" creationId="{79285890-FACA-2B4E-B3EA-943EE20A05E2}"/>
+          </ac:picMkLst>
+        </pc:picChg>
       </pc:sldChg>
     </pc:docChg>
   </pc:docChgLst>
@@ -11659,182 +11711,6 @@
           </a:ln>
         </p:spPr>
       </p:pic>
-      <p:sp>
-        <p:nvSpPr>
-          <p:cNvPr id="98" name="Google Shape;98;g2a805c0f5a2_0_0">
-            <a:extLst>
-              <a:ext uri="{FF2B5EF4-FFF2-40B4-BE49-F238E27FC236}">
-                <a16:creationId xmlns:a16="http://schemas.microsoft.com/office/drawing/2014/main" id="{52A7AF0A-3860-83E0-D799-36B8F64C1B1D}"/>
-              </a:ext>
-            </a:extLst>
-          </p:cNvPr>
-          <p:cNvSpPr txBox="1"/>
-          <p:nvPr/>
-        </p:nvSpPr>
-        <p:spPr>
-          <a:xfrm>
-            <a:off x="67717" y="1365509"/>
-            <a:ext cx="8581846" cy="923010"/>
-          </a:xfrm>
-          <a:prstGeom prst="rect">
-            <a:avLst/>
-          </a:prstGeom>
-          <a:noFill/>
-          <a:ln>
-            <a:noFill/>
-          </a:ln>
-        </p:spPr>
-        <p:txBody>
-          <a:bodyPr spcFirstLastPara="1" wrap="square" lIns="0" tIns="0" rIns="0" bIns="0" anchor="t" anchorCtr="0">
-            <a:spAutoFit/>
-          </a:bodyPr>
-          <a:lstStyle/>
-          <a:p>
-            <a:pPr marL="0" marR="0" lvl="0" indent="0" algn="ctr" rtl="0">
-              <a:spcBef>
-                <a:spcPts val="0"/>
-              </a:spcBef>
-              <a:spcAft>
-                <a:spcPts val="0"/>
-              </a:spcAft>
-              <a:buNone/>
-            </a:pPr>
-            <a:r>
-              <a:rPr lang="pl-PL" sz="5998" b="1" dirty="0">
-                <a:solidFill>
-                  <a:schemeClr val="dk1"/>
-                </a:solidFill>
-              </a:rPr>
-              <a:t> {{Imię}} </a:t>
-            </a:r>
-            <a:r>
-              <a:rPr lang="pl-PL" sz="5800" b="1" dirty="0">
-                <a:solidFill>
-                  <a:schemeClr val="dk1"/>
-                </a:solidFill>
-              </a:rPr>
-              <a:t>{{Nazwisko}}</a:t>
-            </a:r>
-            <a:endParaRPr sz="5800" dirty="0"/>
-          </a:p>
-        </p:txBody>
-      </p:sp>
-      <p:sp>
-        <p:nvSpPr>
-          <p:cNvPr id="99" name="Google Shape;99;g2a805c0f5a2_0_0">
-            <a:extLst>
-              <a:ext uri="{FF2B5EF4-FFF2-40B4-BE49-F238E27FC236}">
-                <a16:creationId xmlns:a16="http://schemas.microsoft.com/office/drawing/2014/main" id="{956F426A-B8C9-7258-1BC9-7656AAD18F9A}"/>
-              </a:ext>
-            </a:extLst>
-          </p:cNvPr>
-          <p:cNvSpPr txBox="1"/>
-          <p:nvPr/>
-        </p:nvSpPr>
-        <p:spPr>
-          <a:xfrm>
-            <a:off x="67717" y="3711986"/>
-            <a:ext cx="8865600" cy="461700"/>
-          </a:xfrm>
-          <a:prstGeom prst="rect">
-            <a:avLst/>
-          </a:prstGeom>
-          <a:noFill/>
-          <a:ln>
-            <a:noFill/>
-          </a:ln>
-        </p:spPr>
-        <p:txBody>
-          <a:bodyPr spcFirstLastPara="1" wrap="square" lIns="0" tIns="0" rIns="0" bIns="0" anchor="t" anchorCtr="0">
-            <a:spAutoFit/>
-          </a:bodyPr>
-          <a:lstStyle/>
-          <a:p>
-            <a:pPr marL="0" marR="0" lvl="0" indent="0" algn="ctr" rtl="0">
-              <a:spcBef>
-                <a:spcPts val="0"/>
-              </a:spcBef>
-              <a:spcAft>
-                <a:spcPts val="0"/>
-              </a:spcAft>
-              <a:buNone/>
-            </a:pPr>
-            <a:r>
-              <a:rPr lang="pl-PL" sz="3000" b="1" dirty="0">
-                <a:solidFill>
-                  <a:schemeClr val="tx1"/>
-                </a:solidFill>
-              </a:rPr>
-              <a:t>{{Branża}}</a:t>
-            </a:r>
-            <a:endParaRPr lang="pl-PL" sz="800" b="1" dirty="0">
-              <a:solidFill>
-                <a:schemeClr val="tx1"/>
-              </a:solidFill>
-            </a:endParaRPr>
-          </a:p>
-        </p:txBody>
-      </p:sp>
-      <p:sp>
-        <p:nvSpPr>
-          <p:cNvPr id="100" name="Google Shape;100;g2a805c0f5a2_0_0">
-            <a:extLst>
-              <a:ext uri="{FF2B5EF4-FFF2-40B4-BE49-F238E27FC236}">
-                <a16:creationId xmlns:a16="http://schemas.microsoft.com/office/drawing/2014/main" id="{1F6AD854-FB68-9FD3-8FF1-4BA2A16A8EB4}"/>
-              </a:ext>
-            </a:extLst>
-          </p:cNvPr>
-          <p:cNvSpPr txBox="1"/>
-          <p:nvPr/>
-        </p:nvSpPr>
-        <p:spPr>
-          <a:xfrm>
-            <a:off x="313500" y="2860818"/>
-            <a:ext cx="8188816" cy="677108"/>
-          </a:xfrm>
-          <a:prstGeom prst="rect">
-            <a:avLst/>
-          </a:prstGeom>
-          <a:noFill/>
-          <a:ln>
-            <a:noFill/>
-          </a:ln>
-        </p:spPr>
-        <p:txBody>
-          <a:bodyPr spcFirstLastPara="1" wrap="square" lIns="0" tIns="0" rIns="0" bIns="0" anchor="t" anchorCtr="0">
-            <a:spAutoFit/>
-          </a:bodyPr>
-          <a:lstStyle/>
-          <a:p>
-            <a:pPr marL="0" marR="0" lvl="0" indent="0" algn="ctr" rtl="0">
-              <a:spcBef>
-                <a:spcPts val="0"/>
-              </a:spcBef>
-              <a:spcAft>
-                <a:spcPts val="0"/>
-              </a:spcAft>
-              <a:buNone/>
-            </a:pPr>
-            <a:r>
-              <a:rPr lang="pl-PL" sz="4400" b="1" dirty="0">
-                <a:solidFill>
-                  <a:schemeClr val="tx1"/>
-                </a:solidFill>
-                <a:latin typeface="Arial" panose="020B0604020202020204" pitchFamily="34" charset="0"/>
-                <a:cs typeface="Arial" panose="020B0604020202020204" pitchFamily="34" charset="0"/>
-              </a:rPr>
-              <a:t>{{Firma}}</a:t>
-            </a:r>
-            <a:endParaRPr lang="pl-PL" b="1" dirty="0">
-              <a:solidFill>
-                <a:schemeClr val="tx1"/>
-              </a:solidFill>
-              <a:latin typeface="Arial" panose="020B0604020202020204" pitchFamily="34" charset="0"/>
-              <a:cs typeface="Arial" panose="020B0604020202020204" pitchFamily="34" charset="0"/>
-            </a:endParaRPr>
-          </a:p>
-        </p:txBody>
-      </p:sp>
       <p:pic>
         <p:nvPicPr>
           <p:cNvPr id="102" name="Google Shape;102;g2a805c0f5a2_0_0">
@@ -11944,6 +11820,170 @@
           </a:p>
         </p:txBody>
       </p:sp>
+      <p:sp>
+        <p:nvSpPr>
+          <p:cNvPr id="3" name="Google Shape;99;g2a805c0f5a2_0_0">
+            <a:extLst>
+              <a:ext uri="{FF2B5EF4-FFF2-40B4-BE49-F238E27FC236}">
+                <a16:creationId xmlns:a16="http://schemas.microsoft.com/office/drawing/2014/main" id="{861F786D-AEC2-5D7B-6491-5C05068EE6E6}"/>
+              </a:ext>
+            </a:extLst>
+          </p:cNvPr>
+          <p:cNvSpPr txBox="1"/>
+          <p:nvPr/>
+        </p:nvSpPr>
+        <p:spPr>
+          <a:xfrm>
+            <a:off x="313499" y="3471373"/>
+            <a:ext cx="8336063" cy="584775"/>
+          </a:xfrm>
+          <a:prstGeom prst="rect">
+            <a:avLst/>
+          </a:prstGeom>
+          <a:noFill/>
+          <a:ln>
+            <a:noFill/>
+          </a:ln>
+        </p:spPr>
+        <p:txBody>
+          <a:bodyPr spcFirstLastPara="1" wrap="square" lIns="0" tIns="0" rIns="0" bIns="0" anchor="t" anchorCtr="0">
+            <a:spAutoFit/>
+          </a:bodyPr>
+          <a:lstStyle/>
+          <a:p>
+            <a:pPr marL="0" marR="0" lvl="0" indent="0" algn="ctr" rtl="0">
+              <a:spcBef>
+                <a:spcPts val="0"/>
+              </a:spcBef>
+              <a:spcAft>
+                <a:spcPts val="0"/>
+              </a:spcAft>
+              <a:buNone/>
+            </a:pPr>
+            <a:r>
+              <a:rPr lang="pl-PL" sz="3800" b="1" dirty="0">
+                <a:solidFill>
+                  <a:schemeClr val="dk1"/>
+                </a:solidFill>
+              </a:rPr>
+              <a:t>{{Branża}}</a:t>
+            </a:r>
+            <a:endParaRPr lang="pl-PL" sz="3800" b="1" dirty="0"/>
+          </a:p>
+        </p:txBody>
+      </p:sp>
+      <p:sp>
+        <p:nvSpPr>
+          <p:cNvPr id="4" name="Google Shape;100;g2a805c0f5a2_0_0">
+            <a:extLst>
+              <a:ext uri="{FF2B5EF4-FFF2-40B4-BE49-F238E27FC236}">
+                <a16:creationId xmlns:a16="http://schemas.microsoft.com/office/drawing/2014/main" id="{0CAEEC03-BA3A-621E-FD23-14561FF70961}"/>
+              </a:ext>
+            </a:extLst>
+          </p:cNvPr>
+          <p:cNvSpPr txBox="1"/>
+          <p:nvPr/>
+        </p:nvSpPr>
+        <p:spPr>
+          <a:xfrm>
+            <a:off x="313499" y="2801201"/>
+            <a:ext cx="8336063" cy="584775"/>
+          </a:xfrm>
+          <a:prstGeom prst="rect">
+            <a:avLst/>
+          </a:prstGeom>
+          <a:noFill/>
+          <a:ln>
+            <a:noFill/>
+          </a:ln>
+        </p:spPr>
+        <p:txBody>
+          <a:bodyPr spcFirstLastPara="1" wrap="square" lIns="0" tIns="0" rIns="0" bIns="0" anchor="t" anchorCtr="0">
+            <a:spAutoFit/>
+          </a:bodyPr>
+          <a:lstStyle/>
+          <a:p>
+            <a:pPr marL="0" marR="0" lvl="0" indent="0" algn="ctr" rtl="0">
+              <a:spcBef>
+                <a:spcPts val="0"/>
+              </a:spcBef>
+              <a:spcAft>
+                <a:spcPts val="0"/>
+              </a:spcAft>
+              <a:buNone/>
+            </a:pPr>
+            <a:r>
+              <a:rPr lang="pl-PL" sz="3800" b="1" dirty="0">
+                <a:solidFill>
+                  <a:srgbClr val="1F1F1F"/>
+                </a:solidFill>
+                <a:latin typeface="Arial" panose="020B0604020202020204" pitchFamily="34" charset="0"/>
+                <a:cs typeface="Arial" panose="020B0604020202020204" pitchFamily="34" charset="0"/>
+              </a:rPr>
+              <a:t>{{Firma}}</a:t>
+            </a:r>
+            <a:endParaRPr lang="pl-PL" sz="3800" b="1" dirty="0">
+              <a:latin typeface="Arial" panose="020B0604020202020204" pitchFamily="34" charset="0"/>
+              <a:cs typeface="Arial" panose="020B0604020202020204" pitchFamily="34" charset="0"/>
+            </a:endParaRPr>
+          </a:p>
+        </p:txBody>
+      </p:sp>
+      <p:sp>
+        <p:nvSpPr>
+          <p:cNvPr id="5" name="Google Shape;98;g2a805c0f5a2_0_0">
+            <a:extLst>
+              <a:ext uri="{FF2B5EF4-FFF2-40B4-BE49-F238E27FC236}">
+                <a16:creationId xmlns:a16="http://schemas.microsoft.com/office/drawing/2014/main" id="{86D234C8-555B-8BA5-EAC3-7455D515869A}"/>
+              </a:ext>
+            </a:extLst>
+          </p:cNvPr>
+          <p:cNvSpPr txBox="1"/>
+          <p:nvPr/>
+        </p:nvSpPr>
+        <p:spPr>
+          <a:xfrm>
+            <a:off x="67717" y="1689937"/>
+            <a:ext cx="8581846" cy="769441"/>
+          </a:xfrm>
+          <a:prstGeom prst="rect">
+            <a:avLst/>
+          </a:prstGeom>
+          <a:noFill/>
+          <a:ln>
+            <a:noFill/>
+          </a:ln>
+        </p:spPr>
+        <p:txBody>
+          <a:bodyPr spcFirstLastPara="1" wrap="square" lIns="0" tIns="0" rIns="0" bIns="0" anchor="t" anchorCtr="0">
+            <a:spAutoFit/>
+          </a:bodyPr>
+          <a:lstStyle/>
+          <a:p>
+            <a:pPr marL="0" marR="0" lvl="0" indent="0" algn="ctr" rtl="0">
+              <a:spcBef>
+                <a:spcPts val="0"/>
+              </a:spcBef>
+              <a:spcAft>
+                <a:spcPts val="0"/>
+              </a:spcAft>
+              <a:buNone/>
+            </a:pPr>
+            <a:r>
+              <a:rPr lang="pl-PL" sz="5000" b="1" dirty="0">
+                <a:solidFill>
+                  <a:schemeClr val="dk1"/>
+                </a:solidFill>
+                <a:latin typeface="Aptos Black" panose="020F0502020204030204" pitchFamily="34" charset="0"/>
+              </a:rPr>
+              <a:t> {{Imię}} {{Nazwisko}}</a:t>
+            </a:r>
+            <a:endParaRPr sz="5000" dirty="0">
+              <a:latin typeface="Aptos Black" panose="020F0502020204030204" pitchFamily="34" charset="0"/>
+            </a:endParaRPr>
+          </a:p>
+        </p:txBody>
+      </p:sp>
     </p:spTree>
     <p:extLst>
       <p:ext uri="{BB962C8B-B14F-4D97-AF65-F5344CB8AC3E}">
@@ -11994,8 +12034,8 @@
         </p:nvSpPr>
         <p:spPr>
           <a:xfrm>
-            <a:off x="0" y="3938900"/>
-            <a:ext cx="9053740" cy="553998"/>
+            <a:off x="0" y="3667235"/>
+            <a:ext cx="9053740" cy="677108"/>
           </a:xfrm>
           <a:prstGeom prst="rect">
             <a:avLst/>
@@ -12013,13 +12053,13 @@
               <a:defRPr/>
             </a:pPr>
             <a:r>
-              <a:rPr lang="pl-PL" sz="3000" b="1" dirty="0">
+              <a:rPr lang="pl-PL" sz="3800" b="1" dirty="0">
                 <a:latin typeface="Arial" panose="020B0604020202020204" pitchFamily="34" charset="0"/>
                 <a:cs typeface="Arial" panose="020B0604020202020204" pitchFamily="34" charset="0"/>
               </a:rPr>
               <a:t>{{Branża}}</a:t>
             </a:r>
-            <a:endParaRPr lang="pl-PL" sz="3000" b="1" dirty="0">
+            <a:endParaRPr lang="pl-PL" sz="3800" b="1" dirty="0">
               <a:solidFill>
                 <a:sysClr val="windowText" lastClr="000000"/>
               </a:solidFill>
@@ -12043,8 +12083,8 @@
         </p:nvSpPr>
         <p:spPr>
           <a:xfrm>
-            <a:off x="18823" y="1504353"/>
-            <a:ext cx="9034917" cy="1015663"/>
+            <a:off x="18823" y="1679844"/>
+            <a:ext cx="9034917" cy="861774"/>
           </a:xfrm>
           <a:prstGeom prst="rect">
             <a:avLst/>
@@ -12062,7 +12102,7 @@
               <a:defRPr/>
             </a:pPr>
             <a:r>
-              <a:rPr lang="pl-PL" sz="6000" b="1" dirty="0">
+              <a:rPr lang="pl-PL" sz="5000" b="1" dirty="0">
                 <a:solidFill>
                   <a:srgbClr val="D7182A"/>
                 </a:solidFill>
@@ -12086,8 +12126,8 @@
         </p:nvSpPr>
         <p:spPr>
           <a:xfrm>
-            <a:off x="-1" y="2858427"/>
-            <a:ext cx="9072563" cy="769441"/>
+            <a:off x="-1" y="2916237"/>
+            <a:ext cx="9072563" cy="677108"/>
           </a:xfrm>
           <a:prstGeom prst="rect">
             <a:avLst/>
@@ -12105,7 +12145,7 @@
               <a:defRPr/>
             </a:pPr>
             <a:r>
-              <a:rPr lang="pl-PL" sz="4400" b="1" dirty="0">
+              <a:rPr lang="pl-PL" sz="3800" b="1" dirty="0">
                 <a:solidFill>
                   <a:sysClr val="windowText" lastClr="000000"/>
                 </a:solidFill>
@@ -12315,10 +12355,10 @@
       </p:pic>
       <p:sp>
         <p:nvSpPr>
-          <p:cNvPr id="98" name="Google Shape;98;g2a805c0f5a2_0_0">
+          <p:cNvPr id="99" name="Google Shape;99;g2a805c0f5a2_0_0">
             <a:extLst>
               <a:ext uri="{FF2B5EF4-FFF2-40B4-BE49-F238E27FC236}">
-                <a16:creationId xmlns:a16="http://schemas.microsoft.com/office/drawing/2014/main" id="{2A8E9582-D9E2-4442-B5B8-8BF1AEF490C5}"/>
+                <a16:creationId xmlns:a16="http://schemas.microsoft.com/office/drawing/2014/main" id="{FBB8D1D6-104C-92E9-79E2-8B7A5A18F731}"/>
               </a:ext>
             </a:extLst>
           </p:cNvPr>
@@ -12327,8 +12367,8 @@
         </p:nvSpPr>
         <p:spPr>
           <a:xfrm>
-            <a:off x="67717" y="1365509"/>
-            <a:ext cx="8581846" cy="923010"/>
+            <a:off x="313499" y="3471373"/>
+            <a:ext cx="8336063" cy="584775"/>
           </a:xfrm>
           <a:prstGeom prst="rect">
             <a:avLst/>
@@ -12354,74 +12394,14 @@
               <a:buNone/>
             </a:pPr>
             <a:r>
-              <a:rPr lang="pl-PL" sz="5998" b="1" dirty="0">
-                <a:solidFill>
-                  <a:schemeClr val="dk1"/>
-                </a:solidFill>
-              </a:rPr>
-              <a:t> {{Imię}} </a:t>
-            </a:r>
-            <a:r>
-              <a:rPr lang="pl-PL" sz="5800" b="1" dirty="0">
-                <a:solidFill>
-                  <a:schemeClr val="dk1"/>
-                </a:solidFill>
-              </a:rPr>
-              <a:t>{{Nazwisko}}</a:t>
-            </a:r>
-            <a:endParaRPr sz="5800" dirty="0"/>
-          </a:p>
-        </p:txBody>
-      </p:sp>
-      <p:sp>
-        <p:nvSpPr>
-          <p:cNvPr id="99" name="Google Shape;99;g2a805c0f5a2_0_0">
-            <a:extLst>
-              <a:ext uri="{FF2B5EF4-FFF2-40B4-BE49-F238E27FC236}">
-                <a16:creationId xmlns:a16="http://schemas.microsoft.com/office/drawing/2014/main" id="{FBB8D1D6-104C-92E9-79E2-8B7A5A18F731}"/>
-              </a:ext>
-            </a:extLst>
-          </p:cNvPr>
-          <p:cNvSpPr txBox="1"/>
-          <p:nvPr/>
-        </p:nvSpPr>
-        <p:spPr>
-          <a:xfrm>
-            <a:off x="67717" y="3711986"/>
-            <a:ext cx="8865600" cy="461700"/>
-          </a:xfrm>
-          <a:prstGeom prst="rect">
-            <a:avLst/>
-          </a:prstGeom>
-          <a:noFill/>
-          <a:ln>
-            <a:noFill/>
-          </a:ln>
-        </p:spPr>
-        <p:txBody>
-          <a:bodyPr spcFirstLastPara="1" wrap="square" lIns="0" tIns="0" rIns="0" bIns="0" anchor="t" anchorCtr="0">
-            <a:spAutoFit/>
-          </a:bodyPr>
-          <a:lstStyle/>
-          <a:p>
-            <a:pPr marL="0" marR="0" lvl="0" indent="0" algn="ctr" rtl="0">
-              <a:spcBef>
-                <a:spcPts val="0"/>
-              </a:spcBef>
-              <a:spcAft>
-                <a:spcPts val="0"/>
-              </a:spcAft>
-              <a:buNone/>
-            </a:pPr>
-            <a:r>
-              <a:rPr lang="pl-PL" sz="3000" b="1" dirty="0">
+              <a:rPr lang="pl-PL" sz="3800" b="1" dirty="0">
                 <a:solidFill>
                   <a:schemeClr val="dk1"/>
                 </a:solidFill>
               </a:rPr>
               <a:t>{{Branża}}</a:t>
             </a:r>
-            <a:endParaRPr lang="pl-PL" sz="800" b="1" dirty="0"/>
+            <a:endParaRPr lang="pl-PL" sz="3800" b="1" dirty="0"/>
           </a:p>
         </p:txBody>
       </p:sp>
@@ -12439,8 +12419,8 @@
         </p:nvSpPr>
         <p:spPr>
           <a:xfrm>
-            <a:off x="313500" y="2860818"/>
-            <a:ext cx="8188816" cy="677108"/>
+            <a:off x="313499" y="2801201"/>
+            <a:ext cx="8336063" cy="584775"/>
           </a:xfrm>
           <a:prstGeom prst="rect">
             <a:avLst/>
@@ -12466,16 +12446,18 @@
               <a:buNone/>
             </a:pPr>
             <a:r>
-              <a:rPr lang="pl-PL" sz="4400" b="1" dirty="0">
+              <a:rPr lang="pl-PL" sz="3800" b="1" dirty="0">
                 <a:solidFill>
                   <a:srgbClr val="1F1F1F"/>
                 </a:solidFill>
-                <a:latin typeface="+mj-lt"/>
+                <a:latin typeface="Arial" panose="020B0604020202020204" pitchFamily="34" charset="0"/>
+                <a:cs typeface="Arial" panose="020B0604020202020204" pitchFamily="34" charset="0"/>
               </a:rPr>
               <a:t>{{Firma}}</a:t>
             </a:r>
-            <a:endParaRPr lang="pl-PL" b="1" dirty="0">
-              <a:latin typeface="+mj-lt"/>
+            <a:endParaRPr lang="pl-PL" sz="3800" b="1" dirty="0">
+              <a:latin typeface="Arial" panose="020B0604020202020204" pitchFamily="34" charset="0"/>
+              <a:cs typeface="Arial" panose="020B0604020202020204" pitchFamily="34" charset="0"/>
             </a:endParaRPr>
           </a:p>
         </p:txBody>
@@ -12501,8 +12483,8 @@
         </p:blipFill>
         <p:spPr>
           <a:xfrm>
-            <a:off x="470059" y="4892993"/>
-            <a:ext cx="3286125" cy="219075"/>
+            <a:off x="470060" y="4892993"/>
+            <a:ext cx="3286124" cy="219075"/>
           </a:xfrm>
           <a:prstGeom prst="rect">
             <a:avLst/>
@@ -12586,6 +12568,61 @@
               </a:rPr>
               <a:t>{{Grupa}}</a:t>
             </a:r>
+          </a:p>
+        </p:txBody>
+      </p:sp>
+      <p:sp>
+        <p:nvSpPr>
+          <p:cNvPr id="3" name="Google Shape;98;g2a805c0f5a2_0_0">
+            <a:extLst>
+              <a:ext uri="{FF2B5EF4-FFF2-40B4-BE49-F238E27FC236}">
+                <a16:creationId xmlns:a16="http://schemas.microsoft.com/office/drawing/2014/main" id="{52A7AF0A-3860-83E0-D799-36B8F64C1B1D}"/>
+              </a:ext>
+            </a:extLst>
+          </p:cNvPr>
+          <p:cNvSpPr txBox="1"/>
+          <p:nvPr/>
+        </p:nvSpPr>
+        <p:spPr>
+          <a:xfrm>
+            <a:off x="67717" y="1689937"/>
+            <a:ext cx="8581846" cy="769441"/>
+          </a:xfrm>
+          <a:prstGeom prst="rect">
+            <a:avLst/>
+          </a:prstGeom>
+          <a:noFill/>
+          <a:ln>
+            <a:noFill/>
+          </a:ln>
+        </p:spPr>
+        <p:txBody>
+          <a:bodyPr spcFirstLastPara="1" wrap="square" lIns="0" tIns="0" rIns="0" bIns="0" anchor="t" anchorCtr="0">
+            <a:spAutoFit/>
+          </a:bodyPr>
+          <a:lstStyle/>
+          <a:p>
+            <a:pPr marL="0" marR="0" lvl="0" indent="0" algn="ctr" rtl="0">
+              <a:spcBef>
+                <a:spcPts val="0"/>
+              </a:spcBef>
+              <a:spcAft>
+                <a:spcPts val="0"/>
+              </a:spcAft>
+              <a:buNone/>
+            </a:pPr>
+            <a:r>
+              <a:rPr lang="pl-PL" sz="5000" b="1" dirty="0">
+                <a:solidFill>
+                  <a:schemeClr val="dk1"/>
+                </a:solidFill>
+                <a:latin typeface="Aptos Black" panose="020F0502020204030204" pitchFamily="34" charset="0"/>
+              </a:rPr>
+              <a:t> {{Imię}} {{Nazwisko}}</a:t>
+            </a:r>
+            <a:endParaRPr sz="5000" dirty="0">
+              <a:latin typeface="Aptos Black" panose="020F0502020204030204" pitchFamily="34" charset="0"/>
+            </a:endParaRPr>
           </a:p>
         </p:txBody>
       </p:sp>

--- a/Badge CC.pptx
+++ b/Badge CC.pptx
@@ -269,7 +269,7 @@
       <p15:sldGuideLst xmlns:p15="http://schemas.microsoft.com/office/powerpoint/2012/main"/>
     </p:ext>
     <p:ext uri="GoogleSlidesCustomDataVersion2">
-      <go:slidesCustomData xmlns:go="http://customooxmlschemas.google.com/" xmlns:ahyp="http://schemas.microsoft.com/office/drawing/2018/hyperlinkcolor" xmlns:p15="http://schemas.microsoft.com/office/powerpoint/2012/main" xmlns:p14="http://schemas.microsoft.com/office/powerpoint/2010/main" xmlns:com="http://schemas.openxmlformats.org/drawingml/2006/compatibility" xmlns:pvml="urn:schemas-microsoft-com:office:powerpoint" xmlns:v="urn:schemas-microsoft-com:vml" xmlns:o="urn:schemas-microsoft-com:office:office" xmlns:dgm="http://schemas.openxmlformats.org/drawingml/2006/diagram" xmlns:c="http://schemas.openxmlformats.org/drawingml/2006/chart" xmlns:mv="urn:schemas-microsoft-com:mac:vml" xmlns:mc="http://schemas.openxmlformats.org/markup-compatibility/2006" xmlns="" r:id="rId63" roundtripDataSignature="AMtx7miUS1/sxxL4JgbZEnfhDFKesaJ+9Q=="/>
+      <go:slidesCustomData xmlns="" xmlns:mc="http://schemas.openxmlformats.org/markup-compatibility/2006" xmlns:mv="urn:schemas-microsoft-com:mac:vml" xmlns:c="http://schemas.openxmlformats.org/drawingml/2006/chart" xmlns:dgm="http://schemas.openxmlformats.org/drawingml/2006/diagram" xmlns:o="urn:schemas-microsoft-com:office:office" xmlns:v="urn:schemas-microsoft-com:vml" xmlns:pvml="urn:schemas-microsoft-com:office:powerpoint" xmlns:com="http://schemas.openxmlformats.org/drawingml/2006/compatibility" xmlns:p14="http://schemas.microsoft.com/office/powerpoint/2010/main" xmlns:p15="http://schemas.microsoft.com/office/powerpoint/2012/main" xmlns:ahyp="http://schemas.microsoft.com/office/drawing/2018/hyperlinkcolor" xmlns:go="http://customooxmlschemas.google.com/" r:id="rId63" roundtripDataSignature="AMtx7miUS1/sxxL4JgbZEnfhDFKesaJ+9Q=="/>
     </p:ext>
   </p:extLst>
 </p:presentation>
@@ -278,7 +278,7 @@
 <file path=ppt/revisionInfo.xml><?xml version="1.0" encoding="utf-8"?>
 <p1510:revInfo xmlns:a="http://schemas.openxmlformats.org/drawingml/2006/main" xmlns:r="http://schemas.openxmlformats.org/officeDocument/2006/relationships" xmlns:p1510="http://schemas.microsoft.com/office/powerpoint/2015/10/main">
   <p1510:revLst>
-    <p1510:client id="{9EFC575E-38DB-48DC-BCFB-263BE95900F3}" v="2" dt="2026-04-21T09:07:04.166"/>
+    <p1510:client id="{9EFC575E-38DB-48DC-BCFB-263BE95900F3}" v="4" dt="2026-04-21T09:13:16.290"/>
   </p1510:revLst>
 </p1510:revInfo>
 </file>
@@ -288,12 +288,12 @@
   <pc:docChgLst>
     <pc:chgData name="Patryk Wyczółkowski - The Company" userId="288d461d-eaab-4b00-b800-aa4e5a28dfe6" providerId="ADAL" clId="{023E43D6-DC3E-4706-BB42-F0DBAC8333BE}"/>
     <pc:docChg chg="undo custSel addSld delSld modSld sldOrd addSection modSection">
-      <pc:chgData name="Patryk Wyczółkowski - The Company" userId="288d461d-eaab-4b00-b800-aa4e5a28dfe6" providerId="ADAL" clId="{023E43D6-DC3E-4706-BB42-F0DBAC8333BE}" dt="2026-04-21T09:07:52.801" v="336" actId="1076"/>
+      <pc:chgData name="Patryk Wyczółkowski - The Company" userId="288d461d-eaab-4b00-b800-aa4e5a28dfe6" providerId="ADAL" clId="{023E43D6-DC3E-4706-BB42-F0DBAC8333BE}" dt="2026-04-21T09:13:16.290" v="366"/>
       <pc:docMkLst>
         <pc:docMk/>
       </pc:docMkLst>
       <pc:sldChg chg="addSp delSp modSp mod modNotesTx">
-        <pc:chgData name="Patryk Wyczółkowski - The Company" userId="288d461d-eaab-4b00-b800-aa4e5a28dfe6" providerId="ADAL" clId="{023E43D6-DC3E-4706-BB42-F0DBAC8333BE}" dt="2026-04-21T09:07:04.166" v="330"/>
+        <pc:chgData name="Patryk Wyczółkowski - The Company" userId="288d461d-eaab-4b00-b800-aa4e5a28dfe6" providerId="ADAL" clId="{023E43D6-DC3E-4706-BB42-F0DBAC8333BE}" dt="2026-04-21T09:13:04.956" v="364" actId="1076"/>
         <pc:sldMkLst>
           <pc:docMk/>
           <pc:sldMk cId="1622968975" sldId="295"/>
@@ -306,16 +306,16 @@
             <ac:spMk id="2" creationId="{F526C0F5-3FAC-ED2E-4EBA-CE55BAD1943E}"/>
           </ac:spMkLst>
         </pc:spChg>
-        <pc:spChg chg="add mod">
-          <ac:chgData name="Patryk Wyczółkowski - The Company" userId="288d461d-eaab-4b00-b800-aa4e5a28dfe6" providerId="ADAL" clId="{023E43D6-DC3E-4706-BB42-F0DBAC8333BE}" dt="2026-04-21T09:07:04.166" v="330"/>
+        <pc:spChg chg="add del mod">
+          <ac:chgData name="Patryk Wyczółkowski - The Company" userId="288d461d-eaab-4b00-b800-aa4e5a28dfe6" providerId="ADAL" clId="{023E43D6-DC3E-4706-BB42-F0DBAC8333BE}" dt="2026-04-21T09:13:04.956" v="364" actId="1076"/>
           <ac:spMkLst>
             <pc:docMk/>
             <pc:sldMk cId="1622968975" sldId="295"/>
             <ac:spMk id="3" creationId="{861F786D-AEC2-5D7B-6491-5C05068EE6E6}"/>
           </ac:spMkLst>
         </pc:spChg>
-        <pc:spChg chg="add mod">
-          <ac:chgData name="Patryk Wyczółkowski - The Company" userId="288d461d-eaab-4b00-b800-aa4e5a28dfe6" providerId="ADAL" clId="{023E43D6-DC3E-4706-BB42-F0DBAC8333BE}" dt="2026-04-21T09:07:04.166" v="330"/>
+        <pc:spChg chg="add del mod">
+          <ac:chgData name="Patryk Wyczółkowski - The Company" userId="288d461d-eaab-4b00-b800-aa4e5a28dfe6" providerId="ADAL" clId="{023E43D6-DC3E-4706-BB42-F0DBAC8333BE}" dt="2026-04-21T09:12:40.910" v="345" actId="478"/>
           <ac:spMkLst>
             <pc:docMk/>
             <pc:sldMk cId="1622968975" sldId="295"/>
@@ -323,11 +323,19 @@
           </ac:spMkLst>
         </pc:spChg>
         <pc:spChg chg="add mod">
-          <ac:chgData name="Patryk Wyczółkowski - The Company" userId="288d461d-eaab-4b00-b800-aa4e5a28dfe6" providerId="ADAL" clId="{023E43D6-DC3E-4706-BB42-F0DBAC8333BE}" dt="2026-04-21T09:07:04.166" v="330"/>
+          <ac:chgData name="Patryk Wyczółkowski - The Company" userId="288d461d-eaab-4b00-b800-aa4e5a28dfe6" providerId="ADAL" clId="{023E43D6-DC3E-4706-BB42-F0DBAC8333BE}" dt="2026-04-21T09:12:23.557" v="338" actId="255"/>
           <ac:spMkLst>
             <pc:docMk/>
             <pc:sldMk cId="1622968975" sldId="295"/>
             <ac:spMk id="5" creationId="{86D234C8-555B-8BA5-EAC3-7455D515869A}"/>
+          </ac:spMkLst>
+        </pc:spChg>
+        <pc:spChg chg="add mod">
+          <ac:chgData name="Patryk Wyczółkowski - The Company" userId="288d461d-eaab-4b00-b800-aa4e5a28dfe6" providerId="ADAL" clId="{023E43D6-DC3E-4706-BB42-F0DBAC8333BE}" dt="2026-04-21T09:13:01.373" v="363" actId="404"/>
+          <ac:spMkLst>
+            <pc:docMk/>
+            <pc:sldMk cId="1622968975" sldId="295"/>
+            <ac:spMk id="6" creationId="{771609C9-ABC0-023A-9011-0EE751D5D3BD}"/>
           </ac:spMkLst>
         </pc:spChg>
         <pc:spChg chg="mod">
@@ -411,7 +419,7 @@
         </pc:picChg>
       </pc:sldChg>
       <pc:sldChg chg="addSp delSp modSp add mod ord modNotesTx">
-        <pc:chgData name="Patryk Wyczółkowski - The Company" userId="288d461d-eaab-4b00-b800-aa4e5a28dfe6" providerId="ADAL" clId="{023E43D6-DC3E-4706-BB42-F0DBAC8333BE}" dt="2026-04-21T09:06:53.567" v="328" actId="2711"/>
+        <pc:chgData name="Patryk Wyczółkowski - The Company" userId="288d461d-eaab-4b00-b800-aa4e5a28dfe6" providerId="ADAL" clId="{023E43D6-DC3E-4706-BB42-F0DBAC8333BE}" dt="2026-04-21T09:13:16.290" v="366"/>
         <pc:sldMkLst>
           <pc:docMk/>
           <pc:sldMk cId="1316184106" sldId="305"/>
@@ -424,12 +432,36 @@
             <ac:spMk id="2" creationId="{23A0477D-21B9-A65B-8CA4-9A7B45F952A3}"/>
           </ac:spMkLst>
         </pc:spChg>
-        <pc:spChg chg="add mod">
-          <ac:chgData name="Patryk Wyczółkowski - The Company" userId="288d461d-eaab-4b00-b800-aa4e5a28dfe6" providerId="ADAL" clId="{023E43D6-DC3E-4706-BB42-F0DBAC8333BE}" dt="2026-04-21T09:05:59.757" v="326" actId="1035"/>
+        <pc:spChg chg="add del mod">
+          <ac:chgData name="Patryk Wyczółkowski - The Company" userId="288d461d-eaab-4b00-b800-aa4e5a28dfe6" providerId="ADAL" clId="{023E43D6-DC3E-4706-BB42-F0DBAC8333BE}" dt="2026-04-21T09:13:15.667" v="365" actId="478"/>
           <ac:spMkLst>
             <pc:docMk/>
             <pc:sldMk cId="1316184106" sldId="305"/>
             <ac:spMk id="3" creationId="{52A7AF0A-3860-83E0-D799-36B8F64C1B1D}"/>
+          </ac:spMkLst>
+        </pc:spChg>
+        <pc:spChg chg="add mod">
+          <ac:chgData name="Patryk Wyczółkowski - The Company" userId="288d461d-eaab-4b00-b800-aa4e5a28dfe6" providerId="ADAL" clId="{023E43D6-DC3E-4706-BB42-F0DBAC8333BE}" dt="2026-04-21T09:13:16.290" v="366"/>
+          <ac:spMkLst>
+            <pc:docMk/>
+            <pc:sldMk cId="1316184106" sldId="305"/>
+            <ac:spMk id="4" creationId="{7C9FDD82-BBC4-66F9-4DBD-293C3C4F6BEE}"/>
+          </ac:spMkLst>
+        </pc:spChg>
+        <pc:spChg chg="add mod">
+          <ac:chgData name="Patryk Wyczółkowski - The Company" userId="288d461d-eaab-4b00-b800-aa4e5a28dfe6" providerId="ADAL" clId="{023E43D6-DC3E-4706-BB42-F0DBAC8333BE}" dt="2026-04-21T09:13:16.290" v="366"/>
+          <ac:spMkLst>
+            <pc:docMk/>
+            <pc:sldMk cId="1316184106" sldId="305"/>
+            <ac:spMk id="5" creationId="{7F5EA397-EC9D-57E1-01DC-9765C48AF897}"/>
+          </ac:spMkLst>
+        </pc:spChg>
+        <pc:spChg chg="add mod">
+          <ac:chgData name="Patryk Wyczółkowski - The Company" userId="288d461d-eaab-4b00-b800-aa4e5a28dfe6" providerId="ADAL" clId="{023E43D6-DC3E-4706-BB42-F0DBAC8333BE}" dt="2026-04-21T09:13:16.290" v="366"/>
+          <ac:spMkLst>
+            <pc:docMk/>
+            <pc:sldMk cId="1316184106" sldId="305"/>
+            <ac:spMk id="6" creationId="{C360B144-4471-F8C1-E632-9E63F840DB9E}"/>
           </ac:spMkLst>
         </pc:spChg>
         <pc:spChg chg="del mod">
@@ -440,16 +472,16 @@
             <ac:spMk id="98" creationId="{2A8E9582-D9E2-4442-B5B8-8BF1AEF490C5}"/>
           </ac:spMkLst>
         </pc:spChg>
-        <pc:spChg chg="mod">
-          <ac:chgData name="Patryk Wyczółkowski - The Company" userId="288d461d-eaab-4b00-b800-aa4e5a28dfe6" providerId="ADAL" clId="{023E43D6-DC3E-4706-BB42-F0DBAC8333BE}" dt="2026-04-21T09:06:36.606" v="327" actId="255"/>
+        <pc:spChg chg="del mod">
+          <ac:chgData name="Patryk Wyczółkowski - The Company" userId="288d461d-eaab-4b00-b800-aa4e5a28dfe6" providerId="ADAL" clId="{023E43D6-DC3E-4706-BB42-F0DBAC8333BE}" dt="2026-04-21T09:13:15.667" v="365" actId="478"/>
           <ac:spMkLst>
             <pc:docMk/>
             <pc:sldMk cId="1316184106" sldId="305"/>
             <ac:spMk id="99" creationId="{FBB8D1D6-104C-92E9-79E2-8B7A5A18F731}"/>
           </ac:spMkLst>
         </pc:spChg>
-        <pc:spChg chg="mod">
-          <ac:chgData name="Patryk Wyczółkowski - The Company" userId="288d461d-eaab-4b00-b800-aa4e5a28dfe6" providerId="ADAL" clId="{023E43D6-DC3E-4706-BB42-F0DBAC8333BE}" dt="2026-04-21T09:06:53.567" v="328" actId="2711"/>
+        <pc:spChg chg="del mod">
+          <ac:chgData name="Patryk Wyczółkowski - The Company" userId="288d461d-eaab-4b00-b800-aa4e5a28dfe6" providerId="ADAL" clId="{023E43D6-DC3E-4706-BB42-F0DBAC8333BE}" dt="2026-04-21T09:13:15.667" v="365" actId="478"/>
           <ac:spMkLst>
             <pc:docMk/>
             <pc:sldMk cId="1316184106" sldId="305"/>
@@ -11834,8 +11866,8 @@
         </p:nvSpPr>
         <p:spPr>
           <a:xfrm>
-            <a:off x="313499" y="3471373"/>
-            <a:ext cx="8336063" cy="584775"/>
+            <a:off x="313499" y="3514978"/>
+            <a:ext cx="8336063" cy="492443"/>
           </a:xfrm>
           <a:prstGeom prst="rect">
             <a:avLst/>
@@ -11861,71 +11893,14 @@
               <a:buNone/>
             </a:pPr>
             <a:r>
-              <a:rPr lang="pl-PL" sz="3800" b="1" dirty="0">
+              <a:rPr lang="pl-PL" sz="3200" b="1" dirty="0">
                 <a:solidFill>
                   <a:schemeClr val="dk1"/>
                 </a:solidFill>
               </a:rPr>
               <a:t>{{Branża}}</a:t>
             </a:r>
-            <a:endParaRPr lang="pl-PL" sz="3800" b="1" dirty="0"/>
-          </a:p>
-        </p:txBody>
-      </p:sp>
-      <p:sp>
-        <p:nvSpPr>
-          <p:cNvPr id="4" name="Google Shape;100;g2a805c0f5a2_0_0">
-            <a:extLst>
-              <a:ext uri="{FF2B5EF4-FFF2-40B4-BE49-F238E27FC236}">
-                <a16:creationId xmlns:a16="http://schemas.microsoft.com/office/drawing/2014/main" id="{0CAEEC03-BA3A-621E-FD23-14561FF70961}"/>
-              </a:ext>
-            </a:extLst>
-          </p:cNvPr>
-          <p:cNvSpPr txBox="1"/>
-          <p:nvPr/>
-        </p:nvSpPr>
-        <p:spPr>
-          <a:xfrm>
-            <a:off x="313499" y="2801201"/>
-            <a:ext cx="8336063" cy="584775"/>
-          </a:xfrm>
-          <a:prstGeom prst="rect">
-            <a:avLst/>
-          </a:prstGeom>
-          <a:noFill/>
-          <a:ln>
-            <a:noFill/>
-          </a:ln>
-        </p:spPr>
-        <p:txBody>
-          <a:bodyPr spcFirstLastPara="1" wrap="square" lIns="0" tIns="0" rIns="0" bIns="0" anchor="t" anchorCtr="0">
-            <a:spAutoFit/>
-          </a:bodyPr>
-          <a:lstStyle/>
-          <a:p>
-            <a:pPr marL="0" marR="0" lvl="0" indent="0" algn="ctr" rtl="0">
-              <a:spcBef>
-                <a:spcPts val="0"/>
-              </a:spcBef>
-              <a:spcAft>
-                <a:spcPts val="0"/>
-              </a:spcAft>
-              <a:buNone/>
-            </a:pPr>
-            <a:r>
-              <a:rPr lang="pl-PL" sz="3800" b="1" dirty="0">
-                <a:solidFill>
-                  <a:srgbClr val="1F1F1F"/>
-                </a:solidFill>
-                <a:latin typeface="Arial" panose="020B0604020202020204" pitchFamily="34" charset="0"/>
-                <a:cs typeface="Arial" panose="020B0604020202020204" pitchFamily="34" charset="0"/>
-              </a:rPr>
-              <a:t>{{Firma}}</a:t>
-            </a:r>
-            <a:endParaRPr lang="pl-PL" sz="3800" b="1" dirty="0">
-              <a:latin typeface="Arial" panose="020B0604020202020204" pitchFamily="34" charset="0"/>
-              <a:cs typeface="Arial" panose="020B0604020202020204" pitchFamily="34" charset="0"/>
-            </a:endParaRPr>
+            <a:endParaRPr lang="pl-PL" sz="3200" b="1" dirty="0"/>
           </a:p>
         </p:txBody>
       </p:sp>
@@ -11944,7 +11919,7 @@
         <p:spPr>
           <a:xfrm>
             <a:off x="67717" y="1689937"/>
-            <a:ext cx="8581846" cy="769441"/>
+            <a:ext cx="8581846" cy="830997"/>
           </a:xfrm>
           <a:prstGeom prst="rect">
             <a:avLst/>
@@ -11970,7 +11945,7 @@
               <a:buNone/>
             </a:pPr>
             <a:r>
-              <a:rPr lang="pl-PL" sz="5000" b="1" dirty="0">
+              <a:rPr lang="pl-PL" sz="5200" b="1" dirty="0">
                 <a:solidFill>
                   <a:schemeClr val="dk1"/>
                 </a:solidFill>
@@ -11978,9 +11953,61 @@
               </a:rPr>
               <a:t> {{Imię}} {{Nazwisko}}</a:t>
             </a:r>
-            <a:endParaRPr sz="5000" dirty="0">
+            <a:endParaRPr sz="5200" dirty="0">
               <a:latin typeface="Aptos Black" panose="020F0502020204030204" pitchFamily="34" charset="0"/>
             </a:endParaRPr>
+          </a:p>
+        </p:txBody>
+      </p:sp>
+      <p:sp>
+        <p:nvSpPr>
+          <p:cNvPr id="6" name="Google Shape;99;g2a805c0f5a2_0_0">
+            <a:extLst>
+              <a:ext uri="{FF2B5EF4-FFF2-40B4-BE49-F238E27FC236}">
+                <a16:creationId xmlns:a16="http://schemas.microsoft.com/office/drawing/2014/main" id="{771609C9-ABC0-023A-9011-0EE751D5D3BD}"/>
+              </a:ext>
+            </a:extLst>
+          </p:cNvPr>
+          <p:cNvSpPr txBox="1"/>
+          <p:nvPr/>
+        </p:nvSpPr>
+        <p:spPr>
+          <a:xfrm>
+            <a:off x="332485" y="2875583"/>
+            <a:ext cx="8336063" cy="553998"/>
+          </a:xfrm>
+          <a:prstGeom prst="rect">
+            <a:avLst/>
+          </a:prstGeom>
+          <a:noFill/>
+          <a:ln>
+            <a:noFill/>
+          </a:ln>
+        </p:spPr>
+        <p:txBody>
+          <a:bodyPr spcFirstLastPara="1" wrap="square" lIns="0" tIns="0" rIns="0" bIns="0" anchor="t" anchorCtr="0">
+            <a:spAutoFit/>
+          </a:bodyPr>
+          <a:lstStyle/>
+          <a:p>
+            <a:pPr marL="0" marR="0" lvl="0" indent="0" algn="ctr" rtl="0">
+              <a:spcBef>
+                <a:spcPts val="0"/>
+              </a:spcBef>
+              <a:spcAft>
+                <a:spcPts val="0"/>
+              </a:spcAft>
+              <a:buNone/>
+            </a:pPr>
+            <a:r>
+              <a:rPr lang="pl-PL" sz="3600" b="1" dirty="0">
+                <a:solidFill>
+                  <a:schemeClr val="dk1"/>
+                </a:solidFill>
+              </a:rPr>
+              <a:t>{{Firma}}</a:t>
+            </a:r>
+            <a:endParaRPr lang="pl-PL" sz="3600" b="1" dirty="0"/>
           </a:p>
         </p:txBody>
       </p:sp>
@@ -12353,115 +12380,6 @@
           </a:ln>
         </p:spPr>
       </p:pic>
-      <p:sp>
-        <p:nvSpPr>
-          <p:cNvPr id="99" name="Google Shape;99;g2a805c0f5a2_0_0">
-            <a:extLst>
-              <a:ext uri="{FF2B5EF4-FFF2-40B4-BE49-F238E27FC236}">
-                <a16:creationId xmlns:a16="http://schemas.microsoft.com/office/drawing/2014/main" id="{FBB8D1D6-104C-92E9-79E2-8B7A5A18F731}"/>
-              </a:ext>
-            </a:extLst>
-          </p:cNvPr>
-          <p:cNvSpPr txBox="1"/>
-          <p:nvPr/>
-        </p:nvSpPr>
-        <p:spPr>
-          <a:xfrm>
-            <a:off x="313499" y="3471373"/>
-            <a:ext cx="8336063" cy="584775"/>
-          </a:xfrm>
-          <a:prstGeom prst="rect">
-            <a:avLst/>
-          </a:prstGeom>
-          <a:noFill/>
-          <a:ln>
-            <a:noFill/>
-          </a:ln>
-        </p:spPr>
-        <p:txBody>
-          <a:bodyPr spcFirstLastPara="1" wrap="square" lIns="0" tIns="0" rIns="0" bIns="0" anchor="t" anchorCtr="0">
-            <a:spAutoFit/>
-          </a:bodyPr>
-          <a:lstStyle/>
-          <a:p>
-            <a:pPr marL="0" marR="0" lvl="0" indent="0" algn="ctr" rtl="0">
-              <a:spcBef>
-                <a:spcPts val="0"/>
-              </a:spcBef>
-              <a:spcAft>
-                <a:spcPts val="0"/>
-              </a:spcAft>
-              <a:buNone/>
-            </a:pPr>
-            <a:r>
-              <a:rPr lang="pl-PL" sz="3800" b="1" dirty="0">
-                <a:solidFill>
-                  <a:schemeClr val="dk1"/>
-                </a:solidFill>
-              </a:rPr>
-              <a:t>{{Branża}}</a:t>
-            </a:r>
-            <a:endParaRPr lang="pl-PL" sz="3800" b="1" dirty="0"/>
-          </a:p>
-        </p:txBody>
-      </p:sp>
-      <p:sp>
-        <p:nvSpPr>
-          <p:cNvPr id="100" name="Google Shape;100;g2a805c0f5a2_0_0">
-            <a:extLst>
-              <a:ext uri="{FF2B5EF4-FFF2-40B4-BE49-F238E27FC236}">
-                <a16:creationId xmlns:a16="http://schemas.microsoft.com/office/drawing/2014/main" id="{1A391E51-F2E1-B61B-8167-D5C52DA531C2}"/>
-              </a:ext>
-            </a:extLst>
-          </p:cNvPr>
-          <p:cNvSpPr txBox="1"/>
-          <p:nvPr/>
-        </p:nvSpPr>
-        <p:spPr>
-          <a:xfrm>
-            <a:off x="313499" y="2801201"/>
-            <a:ext cx="8336063" cy="584775"/>
-          </a:xfrm>
-          <a:prstGeom prst="rect">
-            <a:avLst/>
-          </a:prstGeom>
-          <a:noFill/>
-          <a:ln>
-            <a:noFill/>
-          </a:ln>
-        </p:spPr>
-        <p:txBody>
-          <a:bodyPr spcFirstLastPara="1" wrap="square" lIns="0" tIns="0" rIns="0" bIns="0" anchor="t" anchorCtr="0">
-            <a:spAutoFit/>
-          </a:bodyPr>
-          <a:lstStyle/>
-          <a:p>
-            <a:pPr marL="0" marR="0" lvl="0" indent="0" algn="ctr" rtl="0">
-              <a:spcBef>
-                <a:spcPts val="0"/>
-              </a:spcBef>
-              <a:spcAft>
-                <a:spcPts val="0"/>
-              </a:spcAft>
-              <a:buNone/>
-            </a:pPr>
-            <a:r>
-              <a:rPr lang="pl-PL" sz="3800" b="1" dirty="0">
-                <a:solidFill>
-                  <a:srgbClr val="1F1F1F"/>
-                </a:solidFill>
-                <a:latin typeface="Arial" panose="020B0604020202020204" pitchFamily="34" charset="0"/>
-                <a:cs typeface="Arial" panose="020B0604020202020204" pitchFamily="34" charset="0"/>
-              </a:rPr>
-              <a:t>{{Firma}}</a:t>
-            </a:r>
-            <a:endParaRPr lang="pl-PL" sz="3800" b="1" dirty="0">
-              <a:latin typeface="Arial" panose="020B0604020202020204" pitchFamily="34" charset="0"/>
-              <a:cs typeface="Arial" panose="020B0604020202020204" pitchFamily="34" charset="0"/>
-            </a:endParaRPr>
-          </a:p>
-        </p:txBody>
-      </p:sp>
       <p:pic>
         <p:nvPicPr>
           <p:cNvPr id="102" name="Google Shape;102;g2a805c0f5a2_0_0">
@@ -12573,10 +12491,10 @@
       </p:sp>
       <p:sp>
         <p:nvSpPr>
-          <p:cNvPr id="3" name="Google Shape;98;g2a805c0f5a2_0_0">
+          <p:cNvPr id="4" name="Google Shape;99;g2a805c0f5a2_0_0">
             <a:extLst>
               <a:ext uri="{FF2B5EF4-FFF2-40B4-BE49-F238E27FC236}">
-                <a16:creationId xmlns:a16="http://schemas.microsoft.com/office/drawing/2014/main" id="{52A7AF0A-3860-83E0-D799-36B8F64C1B1D}"/>
+                <a16:creationId xmlns:a16="http://schemas.microsoft.com/office/drawing/2014/main" id="{7C9FDD82-BBC4-66F9-4DBD-293C3C4F6BEE}"/>
               </a:ext>
             </a:extLst>
           </p:cNvPr>
@@ -12585,8 +12503,8 @@
         </p:nvSpPr>
         <p:spPr>
           <a:xfrm>
-            <a:off x="67717" y="1689937"/>
-            <a:ext cx="8581846" cy="769441"/>
+            <a:off x="313499" y="3514978"/>
+            <a:ext cx="8336063" cy="492443"/>
           </a:xfrm>
           <a:prstGeom prst="rect">
             <a:avLst/>
@@ -12612,7 +12530,59 @@
               <a:buNone/>
             </a:pPr>
             <a:r>
-              <a:rPr lang="pl-PL" sz="5000" b="1" dirty="0">
+              <a:rPr lang="pl-PL" sz="3200" b="1" dirty="0">
+                <a:solidFill>
+                  <a:schemeClr val="dk1"/>
+                </a:solidFill>
+              </a:rPr>
+              <a:t>{{Branża}}</a:t>
+            </a:r>
+            <a:endParaRPr lang="pl-PL" sz="3200" b="1" dirty="0"/>
+          </a:p>
+        </p:txBody>
+      </p:sp>
+      <p:sp>
+        <p:nvSpPr>
+          <p:cNvPr id="5" name="Google Shape;98;g2a805c0f5a2_0_0">
+            <a:extLst>
+              <a:ext uri="{FF2B5EF4-FFF2-40B4-BE49-F238E27FC236}">
+                <a16:creationId xmlns:a16="http://schemas.microsoft.com/office/drawing/2014/main" id="{7F5EA397-EC9D-57E1-01DC-9765C48AF897}"/>
+              </a:ext>
+            </a:extLst>
+          </p:cNvPr>
+          <p:cNvSpPr txBox="1"/>
+          <p:nvPr/>
+        </p:nvSpPr>
+        <p:spPr>
+          <a:xfrm>
+            <a:off x="67717" y="1689937"/>
+            <a:ext cx="8581846" cy="830997"/>
+          </a:xfrm>
+          <a:prstGeom prst="rect">
+            <a:avLst/>
+          </a:prstGeom>
+          <a:noFill/>
+          <a:ln>
+            <a:noFill/>
+          </a:ln>
+        </p:spPr>
+        <p:txBody>
+          <a:bodyPr spcFirstLastPara="1" wrap="square" lIns="0" tIns="0" rIns="0" bIns="0" anchor="t" anchorCtr="0">
+            <a:spAutoFit/>
+          </a:bodyPr>
+          <a:lstStyle/>
+          <a:p>
+            <a:pPr marL="0" marR="0" lvl="0" indent="0" algn="ctr" rtl="0">
+              <a:spcBef>
+                <a:spcPts val="0"/>
+              </a:spcBef>
+              <a:spcAft>
+                <a:spcPts val="0"/>
+              </a:spcAft>
+              <a:buNone/>
+            </a:pPr>
+            <a:r>
+              <a:rPr lang="pl-PL" sz="5200" b="1" dirty="0">
                 <a:solidFill>
                   <a:schemeClr val="dk1"/>
                 </a:solidFill>
@@ -12620,9 +12590,61 @@
               </a:rPr>
               <a:t> {{Imię}} {{Nazwisko}}</a:t>
             </a:r>
-            <a:endParaRPr sz="5000" dirty="0">
+            <a:endParaRPr sz="5200" dirty="0">
               <a:latin typeface="Aptos Black" panose="020F0502020204030204" pitchFamily="34" charset="0"/>
             </a:endParaRPr>
+          </a:p>
+        </p:txBody>
+      </p:sp>
+      <p:sp>
+        <p:nvSpPr>
+          <p:cNvPr id="6" name="Google Shape;99;g2a805c0f5a2_0_0">
+            <a:extLst>
+              <a:ext uri="{FF2B5EF4-FFF2-40B4-BE49-F238E27FC236}">
+                <a16:creationId xmlns:a16="http://schemas.microsoft.com/office/drawing/2014/main" id="{C360B144-4471-F8C1-E632-9E63F840DB9E}"/>
+              </a:ext>
+            </a:extLst>
+          </p:cNvPr>
+          <p:cNvSpPr txBox="1"/>
+          <p:nvPr/>
+        </p:nvSpPr>
+        <p:spPr>
+          <a:xfrm>
+            <a:off x="332485" y="2875583"/>
+            <a:ext cx="8336063" cy="553998"/>
+          </a:xfrm>
+          <a:prstGeom prst="rect">
+            <a:avLst/>
+          </a:prstGeom>
+          <a:noFill/>
+          <a:ln>
+            <a:noFill/>
+          </a:ln>
+        </p:spPr>
+        <p:txBody>
+          <a:bodyPr spcFirstLastPara="1" wrap="square" lIns="0" tIns="0" rIns="0" bIns="0" anchor="t" anchorCtr="0">
+            <a:spAutoFit/>
+          </a:bodyPr>
+          <a:lstStyle/>
+          <a:p>
+            <a:pPr marL="0" marR="0" lvl="0" indent="0" algn="ctr" rtl="0">
+              <a:spcBef>
+                <a:spcPts val="0"/>
+              </a:spcBef>
+              <a:spcAft>
+                <a:spcPts val="0"/>
+              </a:spcAft>
+              <a:buNone/>
+            </a:pPr>
+            <a:r>
+              <a:rPr lang="pl-PL" sz="3600" b="1" dirty="0">
+                <a:solidFill>
+                  <a:schemeClr val="dk1"/>
+                </a:solidFill>
+              </a:rPr>
+              <a:t>{{Firma}}</a:t>
+            </a:r>
+            <a:endParaRPr lang="pl-PL" sz="3600" b="1" dirty="0"/>
           </a:p>
         </p:txBody>
       </p:sp>

--- a/Badge CC.pptx
+++ b/Badge CC.pptx
@@ -16,12 +16,8 @@
   <p:notesSz cx="1493838" cy="2609850"/>
   <p:embeddedFontLst>
     <p:embeddedFont>
-      <p:font typeface="Aptos Black" panose="020B0004020202020204" pitchFamily="34" charset="0"/>
+      <p:font typeface="Arial Black" panose="020B0A04020102020204" pitchFamily="34" charset="0"/>
       <p:bold r:id="rId6"/>
-    </p:embeddedFont>
-    <p:embeddedFont>
-      <p:font typeface="Arial Black" panose="020B0A04020102020204" pitchFamily="34" charset="0"/>
-      <p:bold r:id="rId7"/>
     </p:embeddedFont>
   </p:embeddedFontLst>
   <p:defaultTextStyle>
@@ -269,7 +265,7 @@
       <p15:sldGuideLst xmlns:p15="http://schemas.microsoft.com/office/powerpoint/2012/main"/>
     </p:ext>
     <p:ext uri="GoogleSlidesCustomDataVersion2">
-      <go:slidesCustomData xmlns="" xmlns:mc="http://schemas.openxmlformats.org/markup-compatibility/2006" xmlns:mv="urn:schemas-microsoft-com:mac:vml" xmlns:c="http://schemas.openxmlformats.org/drawingml/2006/chart" xmlns:dgm="http://schemas.openxmlformats.org/drawingml/2006/diagram" xmlns:o="urn:schemas-microsoft-com:office:office" xmlns:v="urn:schemas-microsoft-com:vml" xmlns:pvml="urn:schemas-microsoft-com:office:powerpoint" xmlns:com="http://schemas.openxmlformats.org/drawingml/2006/compatibility" xmlns:p14="http://schemas.microsoft.com/office/powerpoint/2010/main" xmlns:p15="http://schemas.microsoft.com/office/powerpoint/2012/main" xmlns:ahyp="http://schemas.microsoft.com/office/drawing/2018/hyperlinkcolor" xmlns:go="http://customooxmlschemas.google.com/" r:id="rId63" roundtripDataSignature="AMtx7miUS1/sxxL4JgbZEnfhDFKesaJ+9Q=="/>
+      <go:slidesCustomData xmlns:go="http://customooxmlschemas.google.com/" xmlns:ahyp="http://schemas.microsoft.com/office/drawing/2018/hyperlinkcolor" xmlns:p15="http://schemas.microsoft.com/office/powerpoint/2012/main" xmlns:p14="http://schemas.microsoft.com/office/powerpoint/2010/main" xmlns:com="http://schemas.openxmlformats.org/drawingml/2006/compatibility" xmlns:pvml="urn:schemas-microsoft-com:office:powerpoint" xmlns:v="urn:schemas-microsoft-com:vml" xmlns:o="urn:schemas-microsoft-com:office:office" xmlns:dgm="http://schemas.openxmlformats.org/drawingml/2006/diagram" xmlns:c="http://schemas.openxmlformats.org/drawingml/2006/chart" xmlns:mv="urn:schemas-microsoft-com:mac:vml" xmlns:mc="http://schemas.openxmlformats.org/markup-compatibility/2006" xmlns="" r:id="rId63" roundtripDataSignature="AMtx7miUS1/sxxL4JgbZEnfhDFKesaJ+9Q=="/>
     </p:ext>
   </p:extLst>
 </p:presentation>
@@ -278,7 +274,7 @@
 <file path=ppt/revisionInfo.xml><?xml version="1.0" encoding="utf-8"?>
 <p1510:revInfo xmlns:a="http://schemas.openxmlformats.org/drawingml/2006/main" xmlns:r="http://schemas.openxmlformats.org/officeDocument/2006/relationships" xmlns:p1510="http://schemas.microsoft.com/office/powerpoint/2015/10/main">
   <p1510:revLst>
-    <p1510:client id="{9EFC575E-38DB-48DC-BCFB-263BE95900F3}" v="4" dt="2026-04-21T09:13:16.290"/>
+    <p1510:client id="{9EFC575E-38DB-48DC-BCFB-263BE95900F3}" v="5" dt="2026-04-21T09:15:42.474"/>
   </p1510:revLst>
 </p1510:revInfo>
 </file>
@@ -288,12 +284,12 @@
   <pc:docChgLst>
     <pc:chgData name="Patryk Wyczółkowski - The Company" userId="288d461d-eaab-4b00-b800-aa4e5a28dfe6" providerId="ADAL" clId="{023E43D6-DC3E-4706-BB42-F0DBAC8333BE}"/>
     <pc:docChg chg="undo custSel addSld delSld modSld sldOrd addSection modSection">
-      <pc:chgData name="Patryk Wyczółkowski - The Company" userId="288d461d-eaab-4b00-b800-aa4e5a28dfe6" providerId="ADAL" clId="{023E43D6-DC3E-4706-BB42-F0DBAC8333BE}" dt="2026-04-21T09:13:16.290" v="366"/>
+      <pc:chgData name="Patryk Wyczółkowski - The Company" userId="288d461d-eaab-4b00-b800-aa4e5a28dfe6" providerId="ADAL" clId="{023E43D6-DC3E-4706-BB42-F0DBAC8333BE}" dt="2026-04-21T09:15:42.474" v="369"/>
       <pc:docMkLst>
         <pc:docMk/>
       </pc:docMkLst>
       <pc:sldChg chg="addSp delSp modSp mod modNotesTx">
-        <pc:chgData name="Patryk Wyczółkowski - The Company" userId="288d461d-eaab-4b00-b800-aa4e5a28dfe6" providerId="ADAL" clId="{023E43D6-DC3E-4706-BB42-F0DBAC8333BE}" dt="2026-04-21T09:13:04.956" v="364" actId="1076"/>
+        <pc:chgData name="Patryk Wyczółkowski - The Company" userId="288d461d-eaab-4b00-b800-aa4e5a28dfe6" providerId="ADAL" clId="{023E43D6-DC3E-4706-BB42-F0DBAC8333BE}" dt="2026-04-21T09:15:35.462" v="367" actId="2711"/>
         <pc:sldMkLst>
           <pc:docMk/>
           <pc:sldMk cId="1622968975" sldId="295"/>
@@ -323,7 +319,7 @@
           </ac:spMkLst>
         </pc:spChg>
         <pc:spChg chg="add mod">
-          <ac:chgData name="Patryk Wyczółkowski - The Company" userId="288d461d-eaab-4b00-b800-aa4e5a28dfe6" providerId="ADAL" clId="{023E43D6-DC3E-4706-BB42-F0DBAC8333BE}" dt="2026-04-21T09:12:23.557" v="338" actId="255"/>
+          <ac:chgData name="Patryk Wyczółkowski - The Company" userId="288d461d-eaab-4b00-b800-aa4e5a28dfe6" providerId="ADAL" clId="{023E43D6-DC3E-4706-BB42-F0DBAC8333BE}" dt="2026-04-21T09:15:35.462" v="367" actId="2711"/>
           <ac:spMkLst>
             <pc:docMk/>
             <pc:sldMk cId="1622968975" sldId="295"/>
@@ -419,7 +415,7 @@
         </pc:picChg>
       </pc:sldChg>
       <pc:sldChg chg="addSp delSp modSp add mod ord modNotesTx">
-        <pc:chgData name="Patryk Wyczółkowski - The Company" userId="288d461d-eaab-4b00-b800-aa4e5a28dfe6" providerId="ADAL" clId="{023E43D6-DC3E-4706-BB42-F0DBAC8333BE}" dt="2026-04-21T09:13:16.290" v="366"/>
+        <pc:chgData name="Patryk Wyczółkowski - The Company" userId="288d461d-eaab-4b00-b800-aa4e5a28dfe6" providerId="ADAL" clId="{023E43D6-DC3E-4706-BB42-F0DBAC8333BE}" dt="2026-04-21T09:15:42.474" v="369"/>
         <pc:sldMkLst>
           <pc:docMk/>
           <pc:sldMk cId="1316184106" sldId="305"/>
@@ -441,6 +437,14 @@
           </ac:spMkLst>
         </pc:spChg>
         <pc:spChg chg="add mod">
+          <ac:chgData name="Patryk Wyczółkowski - The Company" userId="288d461d-eaab-4b00-b800-aa4e5a28dfe6" providerId="ADAL" clId="{023E43D6-DC3E-4706-BB42-F0DBAC8333BE}" dt="2026-04-21T09:15:42.474" v="369"/>
+          <ac:spMkLst>
+            <pc:docMk/>
+            <pc:sldMk cId="1316184106" sldId="305"/>
+            <ac:spMk id="3" creationId="{B6907E90-4AF5-FCD0-57BC-3C188FE43458}"/>
+          </ac:spMkLst>
+        </pc:spChg>
+        <pc:spChg chg="add mod">
           <ac:chgData name="Patryk Wyczółkowski - The Company" userId="288d461d-eaab-4b00-b800-aa4e5a28dfe6" providerId="ADAL" clId="{023E43D6-DC3E-4706-BB42-F0DBAC8333BE}" dt="2026-04-21T09:13:16.290" v="366"/>
           <ac:spMkLst>
             <pc:docMk/>
@@ -448,8 +452,8 @@
             <ac:spMk id="4" creationId="{7C9FDD82-BBC4-66F9-4DBD-293C3C4F6BEE}"/>
           </ac:spMkLst>
         </pc:spChg>
-        <pc:spChg chg="add mod">
-          <ac:chgData name="Patryk Wyczółkowski - The Company" userId="288d461d-eaab-4b00-b800-aa4e5a28dfe6" providerId="ADAL" clId="{023E43D6-DC3E-4706-BB42-F0DBAC8333BE}" dt="2026-04-21T09:13:16.290" v="366"/>
+        <pc:spChg chg="add del mod">
+          <ac:chgData name="Patryk Wyczółkowski - The Company" userId="288d461d-eaab-4b00-b800-aa4e5a28dfe6" providerId="ADAL" clId="{023E43D6-DC3E-4706-BB42-F0DBAC8333BE}" dt="2026-04-21T09:15:42.109" v="368" actId="478"/>
           <ac:spMkLst>
             <pc:docMk/>
             <pc:sldMk cId="1316184106" sldId="305"/>
@@ -11949,12 +11953,12 @@
                 <a:solidFill>
                   <a:schemeClr val="dk1"/>
                 </a:solidFill>
-                <a:latin typeface="Aptos Black" panose="020F0502020204030204" pitchFamily="34" charset="0"/>
+                <a:latin typeface="Arial Black" panose="020B0A04020102020204" pitchFamily="34" charset="0"/>
               </a:rPr>
               <a:t> {{Imię}} {{Nazwisko}}</a:t>
             </a:r>
             <a:endParaRPr sz="5200" dirty="0">
-              <a:latin typeface="Aptos Black" panose="020F0502020204030204" pitchFamily="34" charset="0"/>
+              <a:latin typeface="Arial Black" panose="020B0A04020102020204" pitchFamily="34" charset="0"/>
             </a:endParaRPr>
           </a:p>
         </p:txBody>
@@ -12543,61 +12547,6 @@
       </p:sp>
       <p:sp>
         <p:nvSpPr>
-          <p:cNvPr id="5" name="Google Shape;98;g2a805c0f5a2_0_0">
-            <a:extLst>
-              <a:ext uri="{FF2B5EF4-FFF2-40B4-BE49-F238E27FC236}">
-                <a16:creationId xmlns:a16="http://schemas.microsoft.com/office/drawing/2014/main" id="{7F5EA397-EC9D-57E1-01DC-9765C48AF897}"/>
-              </a:ext>
-            </a:extLst>
-          </p:cNvPr>
-          <p:cNvSpPr txBox="1"/>
-          <p:nvPr/>
-        </p:nvSpPr>
-        <p:spPr>
-          <a:xfrm>
-            <a:off x="67717" y="1689937"/>
-            <a:ext cx="8581846" cy="830997"/>
-          </a:xfrm>
-          <a:prstGeom prst="rect">
-            <a:avLst/>
-          </a:prstGeom>
-          <a:noFill/>
-          <a:ln>
-            <a:noFill/>
-          </a:ln>
-        </p:spPr>
-        <p:txBody>
-          <a:bodyPr spcFirstLastPara="1" wrap="square" lIns="0" tIns="0" rIns="0" bIns="0" anchor="t" anchorCtr="0">
-            <a:spAutoFit/>
-          </a:bodyPr>
-          <a:lstStyle/>
-          <a:p>
-            <a:pPr marL="0" marR="0" lvl="0" indent="0" algn="ctr" rtl="0">
-              <a:spcBef>
-                <a:spcPts val="0"/>
-              </a:spcBef>
-              <a:spcAft>
-                <a:spcPts val="0"/>
-              </a:spcAft>
-              <a:buNone/>
-            </a:pPr>
-            <a:r>
-              <a:rPr lang="pl-PL" sz="5200" b="1" dirty="0">
-                <a:solidFill>
-                  <a:schemeClr val="dk1"/>
-                </a:solidFill>
-                <a:latin typeface="Aptos Black" panose="020F0502020204030204" pitchFamily="34" charset="0"/>
-              </a:rPr>
-              <a:t> {{Imię}} {{Nazwisko}}</a:t>
-            </a:r>
-            <a:endParaRPr sz="5200" dirty="0">
-              <a:latin typeface="Aptos Black" panose="020F0502020204030204" pitchFamily="34" charset="0"/>
-            </a:endParaRPr>
-          </a:p>
-        </p:txBody>
-      </p:sp>
-      <p:sp>
-        <p:nvSpPr>
           <p:cNvPr id="6" name="Google Shape;99;g2a805c0f5a2_0_0">
             <a:extLst>
               <a:ext uri="{FF2B5EF4-FFF2-40B4-BE49-F238E27FC236}">
@@ -12645,6 +12594,61 @@
               <a:t>{{Firma}}</a:t>
             </a:r>
             <a:endParaRPr lang="pl-PL" sz="3600" b="1" dirty="0"/>
+          </a:p>
+        </p:txBody>
+      </p:sp>
+      <p:sp>
+        <p:nvSpPr>
+          <p:cNvPr id="3" name="Google Shape;98;g2a805c0f5a2_0_0">
+            <a:extLst>
+              <a:ext uri="{FF2B5EF4-FFF2-40B4-BE49-F238E27FC236}">
+                <a16:creationId xmlns:a16="http://schemas.microsoft.com/office/drawing/2014/main" id="{B6907E90-4AF5-FCD0-57BC-3C188FE43458}"/>
+              </a:ext>
+            </a:extLst>
+          </p:cNvPr>
+          <p:cNvSpPr txBox="1"/>
+          <p:nvPr/>
+        </p:nvSpPr>
+        <p:spPr>
+          <a:xfrm>
+            <a:off x="67717" y="1689937"/>
+            <a:ext cx="8581846" cy="830997"/>
+          </a:xfrm>
+          <a:prstGeom prst="rect">
+            <a:avLst/>
+          </a:prstGeom>
+          <a:noFill/>
+          <a:ln>
+            <a:noFill/>
+          </a:ln>
+        </p:spPr>
+        <p:txBody>
+          <a:bodyPr spcFirstLastPara="1" wrap="square" lIns="0" tIns="0" rIns="0" bIns="0" anchor="t" anchorCtr="0">
+            <a:spAutoFit/>
+          </a:bodyPr>
+          <a:lstStyle/>
+          <a:p>
+            <a:pPr marL="0" marR="0" lvl="0" indent="0" algn="ctr" rtl="0">
+              <a:spcBef>
+                <a:spcPts val="0"/>
+              </a:spcBef>
+              <a:spcAft>
+                <a:spcPts val="0"/>
+              </a:spcAft>
+              <a:buNone/>
+            </a:pPr>
+            <a:r>
+              <a:rPr lang="pl-PL" sz="5200" b="1" dirty="0">
+                <a:solidFill>
+                  <a:schemeClr val="dk1"/>
+                </a:solidFill>
+                <a:latin typeface="Arial Black" panose="020B0A04020102020204" pitchFamily="34" charset="0"/>
+              </a:rPr>
+              <a:t> {{Imię}} {{Nazwisko}}</a:t>
+            </a:r>
+            <a:endParaRPr sz="5200" dirty="0">
+              <a:latin typeface="Arial Black" panose="020B0A04020102020204" pitchFamily="34" charset="0"/>
+            </a:endParaRPr>
           </a:p>
         </p:txBody>
       </p:sp>
